--- a/презентация ТЕЭ FINAL.pptx
+++ b/презентация ТЕЭ FINAL.pptx
@@ -5,7 +5,7 @@
     <p:sldMasterId id="2147483672" r:id="rId1"/>
   </p:sldMasterIdLst>
   <p:notesMasterIdLst>
-    <p:notesMasterId r:id="rId24"/>
+    <p:notesMasterId r:id="rId25"/>
   </p:notesMasterIdLst>
   <p:sldIdLst>
     <p:sldId id="256" r:id="rId2"/>
@@ -22,14 +22,15 @@
     <p:sldId id="267" r:id="rId13"/>
     <p:sldId id="268" r:id="rId14"/>
     <p:sldId id="269" r:id="rId15"/>
-    <p:sldId id="270" r:id="rId16"/>
-    <p:sldId id="271" r:id="rId17"/>
-    <p:sldId id="273" r:id="rId18"/>
-    <p:sldId id="272" r:id="rId19"/>
-    <p:sldId id="274" r:id="rId20"/>
-    <p:sldId id="275" r:id="rId21"/>
-    <p:sldId id="276" r:id="rId22"/>
-    <p:sldId id="277" r:id="rId23"/>
+    <p:sldId id="278" r:id="rId16"/>
+    <p:sldId id="270" r:id="rId17"/>
+    <p:sldId id="271" r:id="rId18"/>
+    <p:sldId id="273" r:id="rId19"/>
+    <p:sldId id="272" r:id="rId20"/>
+    <p:sldId id="274" r:id="rId21"/>
+    <p:sldId id="275" r:id="rId22"/>
+    <p:sldId id="276" r:id="rId23"/>
+    <p:sldId id="277" r:id="rId24"/>
   </p:sldIdLst>
   <p:sldSz cx="12192000" cy="6858000"/>
   <p:notesSz cx="6858000" cy="9144000"/>
@@ -218,7 +219,7 @@
           <a:p>
             <a:fld id="{60AF0FC6-D54B-43DE-AFEC-1A5D1AFFC0A7}" type="datetimeFigureOut">
               <a:rPr lang="ru-RU" smtClean="0"/>
-              <a:t>05.05.2026</a:t>
+              <a:t>12.05.2026</a:t>
             </a:fld>
             <a:endParaRPr lang="ru-RU"/>
           </a:p>
@@ -282,38 +283,37 @@
           <a:p>
             <a:pPr lvl="0"/>
             <a:r>
-              <a:rPr lang="ru-RU" smtClean="0"/>
+              <a:rPr lang="ru-RU"/>
               <a:t>Образец текста</a:t>
             </a:r>
           </a:p>
           <a:p>
             <a:pPr lvl="1"/>
             <a:r>
-              <a:rPr lang="ru-RU" smtClean="0"/>
+              <a:rPr lang="ru-RU"/>
               <a:t>Второй уровень</a:t>
             </a:r>
           </a:p>
           <a:p>
             <a:pPr lvl="2"/>
             <a:r>
-              <a:rPr lang="ru-RU" smtClean="0"/>
+              <a:rPr lang="ru-RU"/>
               <a:t>Третий уровень</a:t>
             </a:r>
           </a:p>
           <a:p>
             <a:pPr lvl="3"/>
             <a:r>
-              <a:rPr lang="ru-RU" smtClean="0"/>
+              <a:rPr lang="ru-RU"/>
               <a:t>Четвертый уровень</a:t>
             </a:r>
           </a:p>
           <a:p>
             <a:pPr lvl="4"/>
             <a:r>
-              <a:rPr lang="ru-RU" smtClean="0"/>
+              <a:rPr lang="ru-RU"/>
               <a:t>Пятый уровень</a:t>
             </a:r>
-            <a:endParaRPr lang="ru-RU"/>
           </a:p>
         </p:txBody>
       </p:sp>
@@ -626,7 +626,7 @@
           </a:lstStyle>
           <a:p>
             <a:r>
-              <a:rPr lang="ru-RU" smtClean="0"/>
+              <a:rPr lang="ru-RU"/>
               <a:t>Образец заголовка</a:t>
             </a:r>
             <a:endParaRPr lang="en-US" dirty="0"/>
@@ -701,7 +701,7 @@
           </a:lstStyle>
           <a:p>
             <a:r>
-              <a:rPr lang="ru-RU" smtClean="0"/>
+              <a:rPr lang="ru-RU"/>
               <a:t>Образец подзаголовка</a:t>
             </a:r>
             <a:endParaRPr lang="en-US" dirty="0"/>
@@ -725,7 +725,7 @@
           <a:p>
             <a:fld id="{C173D2E2-2307-4CAE-AE0F-A325FD4D4B38}" type="datetimeFigureOut">
               <a:rPr lang="ru-RU" smtClean="0"/>
-              <a:t>05.05.2026</a:t>
+              <a:t>12.05.2026</a:t>
             </a:fld>
             <a:endParaRPr lang="ru-RU"/>
           </a:p>
@@ -819,7 +819,7 @@
           <a:lstStyle/>
           <a:p>
             <a:r>
-              <a:rPr lang="ru-RU" smtClean="0"/>
+              <a:rPr lang="ru-RU"/>
               <a:t>Образец заголовка</a:t>
             </a:r>
             <a:endParaRPr lang="en-US" dirty="0"/>
@@ -843,35 +843,35 @@
           <a:p>
             <a:pPr lvl="0"/>
             <a:r>
-              <a:rPr lang="ru-RU" smtClean="0"/>
+              <a:rPr lang="ru-RU"/>
               <a:t>Образец текста</a:t>
             </a:r>
           </a:p>
           <a:p>
             <a:pPr lvl="1"/>
             <a:r>
-              <a:rPr lang="ru-RU" smtClean="0"/>
+              <a:rPr lang="ru-RU"/>
               <a:t>Второй уровень</a:t>
             </a:r>
           </a:p>
           <a:p>
             <a:pPr lvl="2"/>
             <a:r>
-              <a:rPr lang="ru-RU" smtClean="0"/>
+              <a:rPr lang="ru-RU"/>
               <a:t>Третий уровень</a:t>
             </a:r>
           </a:p>
           <a:p>
             <a:pPr lvl="3"/>
             <a:r>
-              <a:rPr lang="ru-RU" smtClean="0"/>
+              <a:rPr lang="ru-RU"/>
               <a:t>Четвертый уровень</a:t>
             </a:r>
           </a:p>
           <a:p>
             <a:pPr lvl="4"/>
             <a:r>
-              <a:rPr lang="ru-RU" smtClean="0"/>
+              <a:rPr lang="ru-RU"/>
               <a:t>Пятый уровень</a:t>
             </a:r>
             <a:endParaRPr lang="en-US" dirty="0"/>
@@ -895,7 +895,7 @@
           <a:p>
             <a:fld id="{C173D2E2-2307-4CAE-AE0F-A325FD4D4B38}" type="datetimeFigureOut">
               <a:rPr lang="ru-RU" smtClean="0"/>
-              <a:t>05.05.2026</a:t>
+              <a:t>12.05.2026</a:t>
             </a:fld>
             <a:endParaRPr lang="ru-RU"/>
           </a:p>
@@ -994,7 +994,7 @@
           <a:lstStyle/>
           <a:p>
             <a:r>
-              <a:rPr lang="ru-RU" smtClean="0"/>
+              <a:rPr lang="ru-RU"/>
               <a:t>Образец заголовка</a:t>
             </a:r>
             <a:endParaRPr lang="en-US" dirty="0"/>
@@ -1023,35 +1023,35 @@
           <a:p>
             <a:pPr lvl="0"/>
             <a:r>
-              <a:rPr lang="ru-RU" smtClean="0"/>
+              <a:rPr lang="ru-RU"/>
               <a:t>Образец текста</a:t>
             </a:r>
           </a:p>
           <a:p>
             <a:pPr lvl="1"/>
             <a:r>
-              <a:rPr lang="ru-RU" smtClean="0"/>
+              <a:rPr lang="ru-RU"/>
               <a:t>Второй уровень</a:t>
             </a:r>
           </a:p>
           <a:p>
             <a:pPr lvl="2"/>
             <a:r>
-              <a:rPr lang="ru-RU" smtClean="0"/>
+              <a:rPr lang="ru-RU"/>
               <a:t>Третий уровень</a:t>
             </a:r>
           </a:p>
           <a:p>
             <a:pPr lvl="3"/>
             <a:r>
-              <a:rPr lang="ru-RU" smtClean="0"/>
+              <a:rPr lang="ru-RU"/>
               <a:t>Четвертый уровень</a:t>
             </a:r>
           </a:p>
           <a:p>
             <a:pPr lvl="4"/>
             <a:r>
-              <a:rPr lang="ru-RU" smtClean="0"/>
+              <a:rPr lang="ru-RU"/>
               <a:t>Пятый уровень</a:t>
             </a:r>
             <a:endParaRPr lang="en-US" dirty="0"/>
@@ -1075,7 +1075,7 @@
           <a:p>
             <a:fld id="{C173D2E2-2307-4CAE-AE0F-A325FD4D4B38}" type="datetimeFigureOut">
               <a:rPr lang="ru-RU" smtClean="0"/>
-              <a:t>05.05.2026</a:t>
+              <a:t>12.05.2026</a:t>
             </a:fld>
             <a:endParaRPr lang="ru-RU"/>
           </a:p>
@@ -1169,7 +1169,7 @@
           <a:lstStyle/>
           <a:p>
             <a:r>
-              <a:rPr lang="ru-RU" smtClean="0"/>
+              <a:rPr lang="ru-RU"/>
               <a:t>Образец заголовка</a:t>
             </a:r>
             <a:endParaRPr lang="en-US" dirty="0"/>
@@ -1193,35 +1193,35 @@
           <a:p>
             <a:pPr lvl="0"/>
             <a:r>
-              <a:rPr lang="ru-RU" smtClean="0"/>
+              <a:rPr lang="ru-RU"/>
               <a:t>Образец текста</a:t>
             </a:r>
           </a:p>
           <a:p>
             <a:pPr lvl="1"/>
             <a:r>
-              <a:rPr lang="ru-RU" smtClean="0"/>
+              <a:rPr lang="ru-RU"/>
               <a:t>Второй уровень</a:t>
             </a:r>
           </a:p>
           <a:p>
             <a:pPr lvl="2"/>
             <a:r>
-              <a:rPr lang="ru-RU" smtClean="0"/>
+              <a:rPr lang="ru-RU"/>
               <a:t>Третий уровень</a:t>
             </a:r>
           </a:p>
           <a:p>
             <a:pPr lvl="3"/>
             <a:r>
-              <a:rPr lang="ru-RU" smtClean="0"/>
+              <a:rPr lang="ru-RU"/>
               <a:t>Четвертый уровень</a:t>
             </a:r>
           </a:p>
           <a:p>
             <a:pPr lvl="4"/>
             <a:r>
-              <a:rPr lang="ru-RU" smtClean="0"/>
+              <a:rPr lang="ru-RU"/>
               <a:t>Пятый уровень</a:t>
             </a:r>
             <a:endParaRPr lang="en-US" dirty="0"/>
@@ -1245,7 +1245,7 @@
           <a:p>
             <a:fld id="{C173D2E2-2307-4CAE-AE0F-A325FD4D4B38}" type="datetimeFigureOut">
               <a:rPr lang="ru-RU" smtClean="0"/>
-              <a:t>05.05.2026</a:t>
+              <a:t>12.05.2026</a:t>
             </a:fld>
             <a:endParaRPr lang="ru-RU"/>
           </a:p>
@@ -1362,7 +1362,7 @@
           </a:lstStyle>
           <a:p>
             <a:r>
-              <a:rPr lang="ru-RU" smtClean="0"/>
+              <a:rPr lang="ru-RU"/>
               <a:t>Образец заголовка</a:t>
             </a:r>
             <a:endParaRPr lang="en-US" dirty="0"/>
@@ -1482,7 +1482,7 @@
           <a:p>
             <a:pPr lvl="0"/>
             <a:r>
-              <a:rPr lang="ru-RU" smtClean="0"/>
+              <a:rPr lang="ru-RU"/>
               <a:t>Образец текста</a:t>
             </a:r>
           </a:p>
@@ -1505,7 +1505,7 @@
           <a:p>
             <a:fld id="{C173D2E2-2307-4CAE-AE0F-A325FD4D4B38}" type="datetimeFigureOut">
               <a:rPr lang="ru-RU" smtClean="0"/>
-              <a:t>05.05.2026</a:t>
+              <a:t>12.05.2026</a:t>
             </a:fld>
             <a:endParaRPr lang="ru-RU"/>
           </a:p>
@@ -1599,7 +1599,7 @@
           <a:lstStyle/>
           <a:p>
             <a:r>
-              <a:rPr lang="ru-RU" smtClean="0"/>
+              <a:rPr lang="ru-RU"/>
               <a:t>Образец заголовка</a:t>
             </a:r>
             <a:endParaRPr lang="en-US" dirty="0"/>
@@ -1628,35 +1628,35 @@
           <a:p>
             <a:pPr lvl="0"/>
             <a:r>
-              <a:rPr lang="ru-RU" smtClean="0"/>
+              <a:rPr lang="ru-RU"/>
               <a:t>Образец текста</a:t>
             </a:r>
           </a:p>
           <a:p>
             <a:pPr lvl="1"/>
             <a:r>
-              <a:rPr lang="ru-RU" smtClean="0"/>
+              <a:rPr lang="ru-RU"/>
               <a:t>Второй уровень</a:t>
             </a:r>
           </a:p>
           <a:p>
             <a:pPr lvl="2"/>
             <a:r>
-              <a:rPr lang="ru-RU" smtClean="0"/>
+              <a:rPr lang="ru-RU"/>
               <a:t>Третий уровень</a:t>
             </a:r>
           </a:p>
           <a:p>
             <a:pPr lvl="3"/>
             <a:r>
-              <a:rPr lang="ru-RU" smtClean="0"/>
+              <a:rPr lang="ru-RU"/>
               <a:t>Четвертый уровень</a:t>
             </a:r>
           </a:p>
           <a:p>
             <a:pPr lvl="4"/>
             <a:r>
-              <a:rPr lang="ru-RU" smtClean="0"/>
+              <a:rPr lang="ru-RU"/>
               <a:t>Пятый уровень</a:t>
             </a:r>
             <a:endParaRPr lang="en-US" dirty="0"/>
@@ -1685,35 +1685,35 @@
           <a:p>
             <a:pPr lvl="0"/>
             <a:r>
-              <a:rPr lang="ru-RU" smtClean="0"/>
+              <a:rPr lang="ru-RU"/>
               <a:t>Образец текста</a:t>
             </a:r>
           </a:p>
           <a:p>
             <a:pPr lvl="1"/>
             <a:r>
-              <a:rPr lang="ru-RU" smtClean="0"/>
+              <a:rPr lang="ru-RU"/>
               <a:t>Второй уровень</a:t>
             </a:r>
           </a:p>
           <a:p>
             <a:pPr lvl="2"/>
             <a:r>
-              <a:rPr lang="ru-RU" smtClean="0"/>
+              <a:rPr lang="ru-RU"/>
               <a:t>Третий уровень</a:t>
             </a:r>
           </a:p>
           <a:p>
             <a:pPr lvl="3"/>
             <a:r>
-              <a:rPr lang="ru-RU" smtClean="0"/>
+              <a:rPr lang="ru-RU"/>
               <a:t>Четвертый уровень</a:t>
             </a:r>
           </a:p>
           <a:p>
             <a:pPr lvl="4"/>
             <a:r>
-              <a:rPr lang="ru-RU" smtClean="0"/>
+              <a:rPr lang="ru-RU"/>
               <a:t>Пятый уровень</a:t>
             </a:r>
             <a:endParaRPr lang="en-US" dirty="0"/>
@@ -1737,7 +1737,7 @@
           <a:p>
             <a:fld id="{C173D2E2-2307-4CAE-AE0F-A325FD4D4B38}" type="datetimeFigureOut">
               <a:rPr lang="ru-RU" smtClean="0"/>
-              <a:t>05.05.2026</a:t>
+              <a:t>12.05.2026</a:t>
             </a:fld>
             <a:endParaRPr lang="ru-RU"/>
           </a:p>
@@ -1880,7 +1880,7 @@
           <a:p>
             <a:pPr lvl="0"/>
             <a:r>
-              <a:rPr lang="ru-RU" smtClean="0"/>
+              <a:rPr lang="ru-RU"/>
               <a:t>Образец текста</a:t>
             </a:r>
           </a:p>
@@ -1908,35 +1908,35 @@
           <a:p>
             <a:pPr lvl="0"/>
             <a:r>
-              <a:rPr lang="ru-RU" smtClean="0"/>
+              <a:rPr lang="ru-RU"/>
               <a:t>Образец текста</a:t>
             </a:r>
           </a:p>
           <a:p>
             <a:pPr lvl="1"/>
             <a:r>
-              <a:rPr lang="ru-RU" smtClean="0"/>
+              <a:rPr lang="ru-RU"/>
               <a:t>Второй уровень</a:t>
             </a:r>
           </a:p>
           <a:p>
             <a:pPr lvl="2"/>
             <a:r>
-              <a:rPr lang="ru-RU" smtClean="0"/>
+              <a:rPr lang="ru-RU"/>
               <a:t>Третий уровень</a:t>
             </a:r>
           </a:p>
           <a:p>
             <a:pPr lvl="3"/>
             <a:r>
-              <a:rPr lang="ru-RU" smtClean="0"/>
+              <a:rPr lang="ru-RU"/>
               <a:t>Четвертый уровень</a:t>
             </a:r>
           </a:p>
           <a:p>
             <a:pPr lvl="4"/>
             <a:r>
-              <a:rPr lang="ru-RU" smtClean="0"/>
+              <a:rPr lang="ru-RU"/>
               <a:t>Пятый уровень</a:t>
             </a:r>
             <a:endParaRPr lang="en-US" dirty="0"/>
@@ -1969,35 +1969,35 @@
           <a:p>
             <a:pPr lvl="0"/>
             <a:r>
-              <a:rPr lang="ru-RU" smtClean="0"/>
+              <a:rPr lang="ru-RU"/>
               <a:t>Образец текста</a:t>
             </a:r>
           </a:p>
           <a:p>
             <a:pPr lvl="1"/>
             <a:r>
-              <a:rPr lang="ru-RU" smtClean="0"/>
+              <a:rPr lang="ru-RU"/>
               <a:t>Второй уровень</a:t>
             </a:r>
           </a:p>
           <a:p>
             <a:pPr lvl="2"/>
             <a:r>
-              <a:rPr lang="ru-RU" smtClean="0"/>
+              <a:rPr lang="ru-RU"/>
               <a:t>Третий уровень</a:t>
             </a:r>
           </a:p>
           <a:p>
             <a:pPr lvl="3"/>
             <a:r>
-              <a:rPr lang="ru-RU" smtClean="0"/>
+              <a:rPr lang="ru-RU"/>
               <a:t>Четвертый уровень</a:t>
             </a:r>
           </a:p>
           <a:p>
             <a:pPr lvl="4"/>
             <a:r>
-              <a:rPr lang="ru-RU" smtClean="0"/>
+              <a:rPr lang="ru-RU"/>
               <a:t>Пятый уровень</a:t>
             </a:r>
             <a:endParaRPr lang="en-US" dirty="0"/>
@@ -2069,7 +2069,7 @@
           <a:p>
             <a:pPr lvl="0"/>
             <a:r>
-              <a:rPr lang="ru-RU" smtClean="0"/>
+              <a:rPr lang="ru-RU"/>
               <a:t>Образец текста</a:t>
             </a:r>
           </a:p>
@@ -2092,7 +2092,7 @@
           <a:p>
             <a:fld id="{C173D2E2-2307-4CAE-AE0F-A325FD4D4B38}" type="datetimeFigureOut">
               <a:rPr lang="ru-RU" smtClean="0"/>
-              <a:t>05.05.2026</a:t>
+              <a:t>12.05.2026</a:t>
             </a:fld>
             <a:endParaRPr lang="ru-RU"/>
           </a:p>
@@ -2156,7 +2156,7 @@
           <a:lstStyle/>
           <a:p>
             <a:r>
-              <a:rPr lang="ru-RU" smtClean="0"/>
+              <a:rPr lang="ru-RU"/>
               <a:t>Образец заголовка</a:t>
             </a:r>
             <a:endParaRPr lang="en-US" dirty="0"/>
@@ -2209,7 +2209,7 @@
           <a:lstStyle/>
           <a:p>
             <a:r>
-              <a:rPr lang="ru-RU" smtClean="0"/>
+              <a:rPr lang="ru-RU"/>
               <a:t>Образец заголовка</a:t>
             </a:r>
             <a:endParaRPr lang="en-US" dirty="0"/>
@@ -2233,7 +2233,7 @@
           <a:p>
             <a:fld id="{C173D2E2-2307-4CAE-AE0F-A325FD4D4B38}" type="datetimeFigureOut">
               <a:rPr lang="ru-RU" smtClean="0"/>
-              <a:t>05.05.2026</a:t>
+              <a:t>12.05.2026</a:t>
             </a:fld>
             <a:endParaRPr lang="ru-RU"/>
           </a:p>
@@ -2328,7 +2328,7 @@
           <a:p>
             <a:fld id="{C173D2E2-2307-4CAE-AE0F-A325FD4D4B38}" type="datetimeFigureOut">
               <a:rPr lang="ru-RU" smtClean="0"/>
-              <a:t>05.05.2026</a:t>
+              <a:t>12.05.2026</a:t>
             </a:fld>
             <a:endParaRPr lang="ru-RU"/>
           </a:p>
@@ -2443,6 +2443,13 @@
             <a:schemeClr val="lt1"/>
           </a:fontRef>
         </p:style>
+        <p:txBody>
+          <a:bodyPr/>
+          <a:lstStyle/>
+          <a:p>
+            <a:endParaRPr lang="ru-RU"/>
+          </a:p>
+        </p:txBody>
       </p:sp>
       <p:sp>
         <p:nvSpPr>
@@ -2483,7 +2490,7 @@
           </a:lstStyle>
           <a:p>
             <a:r>
-              <a:rPr lang="ru-RU" smtClean="0"/>
+              <a:rPr lang="ru-RU"/>
               <a:t>Образец заголовка</a:t>
             </a:r>
             <a:endParaRPr lang="en-US" dirty="0"/>
@@ -2562,35 +2569,35 @@
           <a:p>
             <a:pPr lvl="0"/>
             <a:r>
-              <a:rPr lang="ru-RU" smtClean="0"/>
+              <a:rPr lang="ru-RU"/>
               <a:t>Образец текста</a:t>
             </a:r>
           </a:p>
           <a:p>
             <a:pPr lvl="1"/>
             <a:r>
-              <a:rPr lang="ru-RU" smtClean="0"/>
+              <a:rPr lang="ru-RU"/>
               <a:t>Второй уровень</a:t>
             </a:r>
           </a:p>
           <a:p>
             <a:pPr lvl="2"/>
             <a:r>
-              <a:rPr lang="ru-RU" smtClean="0"/>
+              <a:rPr lang="ru-RU"/>
               <a:t>Третий уровень</a:t>
             </a:r>
           </a:p>
           <a:p>
             <a:pPr lvl="3"/>
             <a:r>
-              <a:rPr lang="ru-RU" smtClean="0"/>
+              <a:rPr lang="ru-RU"/>
               <a:t>Четвертый уровень</a:t>
             </a:r>
           </a:p>
           <a:p>
             <a:pPr lvl="4"/>
             <a:r>
-              <a:rPr lang="ru-RU" smtClean="0"/>
+              <a:rPr lang="ru-RU"/>
               <a:t>Пятый уровень</a:t>
             </a:r>
             <a:endParaRPr lang="en-US" dirty="0"/>
@@ -2662,7 +2669,7 @@
           <a:p>
             <a:pPr lvl="0"/>
             <a:r>
-              <a:rPr lang="ru-RU" smtClean="0"/>
+              <a:rPr lang="ru-RU"/>
               <a:t>Образец текста</a:t>
             </a:r>
           </a:p>
@@ -2685,7 +2692,7 @@
           <a:p>
             <a:fld id="{C173D2E2-2307-4CAE-AE0F-A325FD4D4B38}" type="datetimeFigureOut">
               <a:rPr lang="ru-RU" smtClean="0"/>
-              <a:t>05.05.2026</a:t>
+              <a:t>12.05.2026</a:t>
             </a:fld>
             <a:endParaRPr lang="ru-RU"/>
           </a:p>
@@ -2817,7 +2824,7 @@
           </a:lstStyle>
           <a:p>
             <a:r>
-              <a:rPr lang="ru-RU" smtClean="0"/>
+              <a:rPr lang="ru-RU"/>
               <a:t>Образец заголовка</a:t>
             </a:r>
             <a:endParaRPr lang="en-US" dirty="0"/>
@@ -2893,7 +2900,7 @@
           </a:lstStyle>
           <a:p>
             <a:r>
-              <a:rPr lang="ru-RU" smtClean="0"/>
+              <a:rPr lang="ru-RU"/>
               <a:t>Вставка рисунка</a:t>
             </a:r>
             <a:endParaRPr lang="en-US" dirty="0"/>
@@ -2965,7 +2972,7 @@
           <a:p>
             <a:pPr lvl="0"/>
             <a:r>
-              <a:rPr lang="ru-RU" smtClean="0"/>
+              <a:rPr lang="ru-RU"/>
               <a:t>Образец текста</a:t>
             </a:r>
           </a:p>
@@ -3003,7 +3010,7 @@
           <a:p>
             <a:fld id="{C173D2E2-2307-4CAE-AE0F-A325FD4D4B38}" type="datetimeFigureOut">
               <a:rPr lang="ru-RU" smtClean="0"/>
-              <a:t>05.05.2026</a:t>
+              <a:t>12.05.2026</a:t>
             </a:fld>
             <a:endParaRPr lang="ru-RU"/>
           </a:p>
@@ -3144,7 +3151,7 @@
           <a:lstStyle/>
           <a:p>
             <a:r>
-              <a:rPr lang="ru-RU" smtClean="0"/>
+              <a:rPr lang="ru-RU"/>
               <a:t>Образец заголовка</a:t>
             </a:r>
             <a:endParaRPr lang="en-US" dirty="0"/>
@@ -3247,7 +3254,7 @@
           <a:p>
             <a:fld id="{C173D2E2-2307-4CAE-AE0F-A325FD4D4B38}" type="datetimeFigureOut">
               <a:rPr lang="ru-RU" smtClean="0"/>
-              <a:t>05.05.2026</a:t>
+              <a:t>12.05.2026</a:t>
             </a:fld>
             <a:endParaRPr lang="ru-RU"/>
           </a:p>
@@ -3744,23 +3751,15 @@
           </a:lstStyle>
           <a:p>
             <a:r>
-              <a:rPr lang="ru-RU" sz="3600" dirty="0" smtClean="0"/>
+              <a:rPr lang="ru-RU" sz="3600" dirty="0"/>
               <a:t>Курсовой проект</a:t>
             </a:r>
             <a:br>
-              <a:rPr lang="ru-RU" sz="3600" dirty="0" smtClean="0"/>
+              <a:rPr lang="ru-RU" sz="3600" dirty="0"/>
             </a:br>
             <a:r>
               <a:rPr lang="ru-RU" sz="3600" dirty="0"/>
-              <a:t>на тему «Проектирование ИС </a:t>
-            </a:r>
-            <a:r>
-              <a:rPr lang="ru-RU" sz="3600" dirty="0" smtClean="0"/>
-              <a:t>«Агентство </a:t>
-            </a:r>
-            <a:r>
-              <a:rPr lang="ru-RU" sz="3600" dirty="0"/>
-              <a:t>недвижимости»»</a:t>
+              <a:t>на тему «Проектирование ИС «Агентство недвижимости»»</a:t>
             </a:r>
           </a:p>
         </p:txBody>
@@ -3960,7 +3959,7 @@
               </a:spcBef>
             </a:pPr>
             <a:r>
-              <a:rPr lang="ru-RU" sz="2000" kern="1100" dirty="0" smtClean="0"/>
+              <a:rPr lang="ru-RU" sz="2000" kern="1100" dirty="0"/>
               <a:t>Выполнила: Таипова Е.Э., </a:t>
             </a:r>
           </a:p>
@@ -3974,7 +3973,7 @@
               </a:spcBef>
             </a:pPr>
             <a:r>
-              <a:rPr lang="ru-RU" sz="2000" kern="1100" dirty="0" smtClean="0"/>
+              <a:rPr lang="ru-RU" sz="2000" kern="1100" dirty="0"/>
               <a:t>студентка 2 курса очной формы обучения, </a:t>
             </a:r>
           </a:p>
@@ -3988,7 +3987,7 @@
               </a:spcBef>
             </a:pPr>
             <a:r>
-              <a:rPr lang="ru-RU" sz="2000" kern="1100" dirty="0" smtClean="0"/>
+              <a:rPr lang="ru-RU" sz="2000" kern="1100" dirty="0"/>
               <a:t>группы ИСиП 24-9-1</a:t>
             </a:r>
           </a:p>
@@ -4002,7 +4001,7 @@
               </a:spcBef>
             </a:pPr>
             <a:r>
-              <a:rPr lang="ru-RU" sz="2000" kern="1100" dirty="0" smtClean="0"/>
+              <a:rPr lang="ru-RU" sz="2000" kern="1100" dirty="0"/>
               <a:t>Проверила: Гончарова Т.В., должность: преподаватель проф. дисциплин</a:t>
             </a:r>
           </a:p>
@@ -4079,19 +4078,7 @@
               <a:rPr lang="ru-RU" sz="2000" dirty="0">
                 <a:latin typeface="+mj-lt"/>
               </a:rPr>
-              <a:t>г. Тюмень, </a:t>
-            </a:r>
-            <a:r>
-              <a:rPr lang="ru-RU" sz="2000" dirty="0" smtClean="0">
-                <a:latin typeface="+mj-lt"/>
-              </a:rPr>
-              <a:t>2026 </a:t>
-            </a:r>
-            <a:r>
-              <a:rPr lang="ru-RU" sz="2000" dirty="0">
-                <a:latin typeface="+mj-lt"/>
-              </a:rPr>
-              <a:t>г.</a:t>
+              <a:t>г. Тюмень, 2026 г.</a:t>
             </a:r>
           </a:p>
         </p:txBody>
@@ -4106,13 +4093,6 @@
   <p:clrMapOvr>
     <a:masterClrMapping/>
   </p:clrMapOvr>
-  <p:timing>
-    <p:tnLst>
-      <p:par>
-        <p:cTn id="1" dur="indefinite" restart="never" nodeType="tmRoot"/>
-      </p:par>
-    </p:tnLst>
-  </p:timing>
 </p:sld>
 </file>
 
@@ -4154,10 +4134,9 @@
           <a:lstStyle/>
           <a:p>
             <a:r>
-              <a:rPr lang="ru-RU" dirty="0" smtClean="0"/>
+              <a:rPr lang="ru-RU" dirty="0"/>
               <a:t>Техническое задание</a:t>
             </a:r>
-            <a:endParaRPr lang="ru-RU" dirty="0"/>
           </a:p>
         </p:txBody>
       </p:sp>
@@ -4192,31 +4171,7 @@
             </a:r>
             <a:r>
               <a:rPr lang="ru-RU" sz="4200" dirty="0"/>
-              <a:t> Создание </a:t>
-            </a:r>
-            <a:r>
-              <a:rPr lang="ru-RU" sz="4200" dirty="0" smtClean="0"/>
-              <a:t>рабочего </a:t>
-            </a:r>
-            <a:r>
-              <a:rPr lang="ru-RU" sz="4200" dirty="0"/>
-              <a:t>пространства агента для </a:t>
-            </a:r>
-            <a:r>
-              <a:rPr lang="ru-RU" sz="4200" dirty="0" smtClean="0"/>
-              <a:t>хранения </a:t>
-            </a:r>
-            <a:r>
-              <a:rPr lang="ru-RU" sz="4200" dirty="0"/>
-              <a:t>данных, автоматизированной выгрузки объявлений, генерации юридически корректных договоров и контроля </a:t>
-            </a:r>
-            <a:r>
-              <a:rPr lang="ru-RU" sz="4200" dirty="0" smtClean="0"/>
-              <a:t>сделок</a:t>
-            </a:r>
-            <a:r>
-              <a:rPr lang="ru-RU" sz="4200" dirty="0"/>
-              <a:t>.</a:t>
+              <a:t> Создание рабочего пространства агента для хранения данных, автоматизированной выгрузки объявлений, генерации юридически корректных договоров и контроля сделок.</a:t>
             </a:r>
           </a:p>
           <a:p>
@@ -4224,7 +4179,7 @@
               <a:buNone/>
             </a:pPr>
             <a:r>
-              <a:rPr lang="ru-RU" sz="4200" b="1" dirty="0" smtClean="0"/>
+              <a:rPr lang="ru-RU" sz="4200" b="1" dirty="0"/>
               <a:t>Этапы разработки:</a:t>
             </a:r>
             <a:endParaRPr lang="ru-RU" sz="4200" dirty="0"/>
@@ -4235,16 +4190,8 @@
               <a:buChar char="-"/>
             </a:pPr>
             <a:r>
-              <a:rPr lang="ru-RU" sz="4200" dirty="0" smtClean="0"/>
-              <a:t>Анализ </a:t>
-            </a:r>
-            <a:r>
               <a:rPr lang="ru-RU" sz="4200" dirty="0"/>
-              <a:t>требований и согласование </a:t>
-            </a:r>
-            <a:r>
-              <a:rPr lang="ru-RU" sz="4200" dirty="0" smtClean="0"/>
-              <a:t>архитектуры</a:t>
+              <a:t>Анализ требований и согласование архитектуры</a:t>
             </a:r>
           </a:p>
           <a:p>
@@ -4253,16 +4200,8 @@
               <a:buChar char="-"/>
             </a:pPr>
             <a:r>
-              <a:rPr lang="ru-RU" sz="4200" dirty="0" smtClean="0"/>
-              <a:t>Разработка </a:t>
-            </a:r>
-            <a:r>
               <a:rPr lang="ru-RU" sz="4200" dirty="0"/>
-              <a:t>БД и </a:t>
-            </a:r>
-            <a:r>
-              <a:rPr lang="ru-RU" sz="4200" dirty="0" smtClean="0"/>
-              <a:t>UI</a:t>
+              <a:t>Разработка БД и UI</a:t>
             </a:r>
           </a:p>
           <a:p>
@@ -4271,16 +4210,8 @@
               <a:buChar char="-"/>
             </a:pPr>
             <a:r>
-              <a:rPr lang="ru-RU" sz="4200" dirty="0" smtClean="0"/>
-              <a:t>Программная </a:t>
-            </a:r>
-            <a:r>
               <a:rPr lang="ru-RU" sz="4200" dirty="0"/>
-              <a:t>реализация серверной и клиентской </a:t>
-            </a:r>
-            <a:r>
-              <a:rPr lang="ru-RU" sz="4200" dirty="0" smtClean="0"/>
-              <a:t>частей</a:t>
+              <a:t>Программная реализация серверной и клиентской частей</a:t>
             </a:r>
           </a:p>
           <a:p>
@@ -4289,16 +4220,8 @@
               <a:buChar char="-"/>
             </a:pPr>
             <a:r>
-              <a:rPr lang="ru-RU" sz="4200" dirty="0" smtClean="0"/>
-              <a:t>Настройка </a:t>
-            </a:r>
-            <a:r>
               <a:rPr lang="ru-RU" sz="4200" dirty="0"/>
-              <a:t>модулей генерации документов и внешней </a:t>
-            </a:r>
-            <a:r>
-              <a:rPr lang="ru-RU" sz="4200" dirty="0" smtClean="0"/>
-              <a:t>интеграции</a:t>
+              <a:t>Настройка модулей генерации документов и внешней интеграции</a:t>
             </a:r>
           </a:p>
           <a:p>
@@ -4307,18 +4230,9 @@
               <a:buChar char="-"/>
             </a:pPr>
             <a:r>
-              <a:rPr lang="ru-RU" sz="4200" dirty="0" smtClean="0"/>
-              <a:t>Разработка </a:t>
-            </a:r>
-            <a:r>
               <a:rPr lang="ru-RU" sz="4200" dirty="0"/>
-              <a:t>документации </a:t>
-            </a:r>
-            <a:r>
-              <a:rPr lang="ru-RU" sz="4200" dirty="0" smtClean="0"/>
-              <a:t>и эксплуатация</a:t>
-            </a:r>
-            <a:endParaRPr lang="ru-RU" sz="4200" dirty="0"/>
+              <a:t>Разработка документации и эксплуатация</a:t>
+            </a:r>
           </a:p>
           <a:p>
             <a:pPr marL="0" indent="0">
@@ -4354,12 +4268,8 @@
               <a:buNone/>
             </a:pPr>
             <a:r>
-              <a:rPr lang="ru-RU" sz="4200" b="1" dirty="0" smtClean="0"/>
-              <a:t>Функциональные </a:t>
-            </a:r>
-            <a:r>
               <a:rPr lang="ru-RU" sz="4200" b="1" dirty="0"/>
-              <a:t>требования:</a:t>
+              <a:t>Функциональные требования:</a:t>
             </a:r>
             <a:r>
               <a:rPr lang="ru-RU" sz="4200" dirty="0"/>
@@ -4372,16 +4282,8 @@
               <a:buChar char="-"/>
             </a:pPr>
             <a:r>
-              <a:rPr lang="ru-RU" sz="4200" dirty="0" smtClean="0"/>
-              <a:t>Авторизация </a:t>
-            </a:r>
-            <a:r>
               <a:rPr lang="ru-RU" sz="4200" dirty="0"/>
-              <a:t>и ролевая модель доступа </a:t>
-            </a:r>
-            <a:r>
-              <a:rPr lang="ru-RU" sz="4200" dirty="0" smtClean="0"/>
-              <a:t> </a:t>
+              <a:t>Авторизация и ролевая модель доступа  </a:t>
             </a:r>
           </a:p>
           <a:p>
@@ -4390,12 +4292,8 @@
               <a:buChar char="-"/>
             </a:pPr>
             <a:r>
-              <a:rPr lang="ru-RU" sz="4200" dirty="0" smtClean="0"/>
-              <a:t>CRUD-операции </a:t>
-            </a:r>
-            <a:r>
               <a:rPr lang="ru-RU" sz="4200" dirty="0"/>
-              <a:t>с клиентами и объектами недвижимости </a:t>
+              <a:t>CRUD-операции с клиентами и объектами недвижимости </a:t>
             </a:r>
           </a:p>
           <a:p>
@@ -4404,12 +4302,8 @@
               <a:buChar char="-"/>
             </a:pPr>
             <a:r>
-              <a:rPr lang="ru-RU" sz="4200" dirty="0" smtClean="0"/>
-              <a:t>Загрузка </a:t>
-            </a:r>
-            <a:r>
               <a:rPr lang="ru-RU" sz="4200" dirty="0"/>
-              <a:t>и автоматическая оптимизация фото </a:t>
+              <a:t>Загрузка и автоматическая оптимизация фото </a:t>
             </a:r>
           </a:p>
           <a:p>
@@ -4418,12 +4312,8 @@
               <a:buChar char="-"/>
             </a:pPr>
             <a:r>
-              <a:rPr lang="ru-RU" sz="4200" dirty="0" smtClean="0"/>
-              <a:t>Формирование </a:t>
-            </a:r>
-            <a:r>
               <a:rPr lang="ru-RU" sz="4200" dirty="0"/>
-              <a:t>объявлений и управление статусами выгрузки </a:t>
+              <a:t>Формирование объявлений и управление статусами выгрузки </a:t>
             </a:r>
           </a:p>
           <a:p>
@@ -4432,12 +4322,8 @@
               <a:buChar char="-"/>
             </a:pPr>
             <a:r>
-              <a:rPr lang="ru-RU" sz="4200" dirty="0" smtClean="0"/>
-              <a:t>Привязка </a:t>
-            </a:r>
-            <a:r>
               <a:rPr lang="ru-RU" sz="4200" dirty="0"/>
-              <a:t>покупателя, продавца и объекта к единой карточке сделки </a:t>
+              <a:t>Привязка покупателя, продавца и объекта к единой карточке сделки </a:t>
             </a:r>
           </a:p>
           <a:p>
@@ -4446,20 +4332,12 @@
               <a:buChar char="-"/>
             </a:pPr>
             <a:r>
-              <a:rPr lang="ru-RU" sz="4200" dirty="0" err="1" smtClean="0"/>
+              <a:rPr lang="ru-RU" sz="4200" dirty="0" err="1"/>
               <a:t>Автоподстановка</a:t>
             </a:r>
             <a:r>
-              <a:rPr lang="ru-RU" sz="4200" dirty="0" smtClean="0"/>
-              <a:t> </a:t>
-            </a:r>
-            <a:r>
               <a:rPr lang="ru-RU" sz="4200" dirty="0"/>
-              <a:t>реквизитов в шаблоны </a:t>
-            </a:r>
-            <a:r>
-              <a:rPr lang="ru-RU" sz="4200" dirty="0" smtClean="0"/>
-              <a:t>договоров </a:t>
+              <a:t> реквизитов в шаблоны договоров </a:t>
             </a:r>
           </a:p>
           <a:p>
@@ -4468,7 +4346,7 @@
               <a:buChar char="-"/>
             </a:pPr>
             <a:r>
-              <a:rPr lang="ru-RU" sz="4200" dirty="0" smtClean="0"/>
+              <a:rPr lang="ru-RU" sz="4200" dirty="0"/>
               <a:t>Системное </a:t>
             </a:r>
             <a:r>
@@ -4514,13 +4392,6 @@
   <p:clrMapOvr>
     <a:masterClrMapping/>
   </p:clrMapOvr>
-  <p:timing>
-    <p:tnLst>
-      <p:par>
-        <p:cTn id="1" dur="indefinite" restart="never" nodeType="tmRoot"/>
-      </p:par>
-    </p:tnLst>
-  </p:timing>
 </p:sld>
 </file>
 
@@ -4572,10 +4443,9 @@
               <a:t>UseCase</a:t>
             </a:r>
             <a:r>
-              <a:rPr lang="ru-RU" dirty="0" smtClean="0"/>
+              <a:rPr lang="ru-RU" dirty="0"/>
               <a:t>)</a:t>
             </a:r>
-            <a:endParaRPr lang="ru-RU" dirty="0"/>
           </a:p>
         </p:txBody>
       </p:sp>
@@ -4615,13 +4485,6 @@
   <p:clrMapOvr>
     <a:masterClrMapping/>
   </p:clrMapOvr>
-  <p:timing>
-    <p:tnLst>
-      <p:par>
-        <p:cTn id="1" dur="indefinite" restart="never" nodeType="tmRoot"/>
-      </p:par>
-    </p:tnLst>
-  </p:timing>
 </p:sld>
 </file>
 
@@ -4674,11 +4537,7 @@
             </a:r>
             <a:r>
               <a:rPr lang="en-US" dirty="0"/>
-              <a:t>Activity</a:t>
-            </a:r>
-            <a:r>
-              <a:rPr lang="en-US" dirty="0" smtClean="0"/>
-              <a:t>)</a:t>
+              <a:t>Activity)</a:t>
             </a:r>
             <a:endParaRPr lang="ru-RU" dirty="0"/>
           </a:p>
@@ -4720,13 +4579,6 @@
   <p:clrMapOvr>
     <a:masterClrMapping/>
   </p:clrMapOvr>
-  <p:timing>
-    <p:tnLst>
-      <p:par>
-        <p:cTn id="1" dur="indefinite" restart="never" nodeType="tmRoot"/>
-      </p:par>
-    </p:tnLst>
-  </p:timing>
 </p:sld>
 </file>
 
@@ -4779,11 +4631,7 @@
             </a:r>
             <a:r>
               <a:rPr lang="en-US" dirty="0"/>
-              <a:t>Sequence</a:t>
-            </a:r>
-            <a:r>
-              <a:rPr lang="en-US" dirty="0" smtClean="0"/>
-              <a:t>)</a:t>
+              <a:t>Sequence)</a:t>
             </a:r>
             <a:endParaRPr lang="ru-RU" dirty="0"/>
           </a:p>
@@ -4825,13 +4673,6 @@
   <p:clrMapOvr>
     <a:masterClrMapping/>
   </p:clrMapOvr>
-  <p:timing>
-    <p:tnLst>
-      <p:par>
-        <p:cTn id="1" dur="indefinite" restart="never" nodeType="tmRoot"/>
-      </p:par>
-    </p:tnLst>
-  </p:timing>
 </p:sld>
 </file>
 
@@ -4882,11 +4723,7 @@
             </a:r>
             <a:r>
               <a:rPr lang="en-US" dirty="0"/>
-              <a:t>Class</a:t>
-            </a:r>
-            <a:r>
-              <a:rPr lang="en-US" dirty="0" smtClean="0"/>
-              <a:t>)</a:t>
+              <a:t>Class)</a:t>
             </a:r>
             <a:endParaRPr lang="ru-RU" dirty="0"/>
           </a:p>
@@ -4928,13 +4765,6 @@
   <p:clrMapOvr>
     <a:masterClrMapping/>
   </p:clrMapOvr>
-  <p:timing>
-    <p:tnLst>
-      <p:par>
-        <p:cTn id="1" dur="indefinite" restart="never" nodeType="tmRoot"/>
-      </p:par>
-    </p:tnLst>
-  </p:timing>
 </p:sld>
 </file>
 
@@ -4957,7 +4787,13 @@
       </p:grpSpPr>
       <p:sp>
         <p:nvSpPr>
-          <p:cNvPr id="2" name="Заголовок 1"/>
+          <p:cNvPr id="4" name="Заголовок 1">
+            <a:extLst>
+              <a:ext uri="{FF2B5EF4-FFF2-40B4-BE49-F238E27FC236}">
+                <a16:creationId xmlns:a16="http://schemas.microsoft.com/office/drawing/2014/main" id="{7E2E7CBE-450C-3641-C814-18F55ACA0A93}"/>
+              </a:ext>
+            </a:extLst>
+          </p:cNvPr>
           <p:cNvSpPr>
             <a:spLocks noGrp="1"/>
           </p:cNvSpPr>
@@ -4967,7 +4803,7 @@
         </p:nvSpPr>
         <p:spPr>
           <a:xfrm>
-            <a:off x="2231136" y="433469"/>
+            <a:off x="2231135" y="404949"/>
             <a:ext cx="7729728" cy="1188720"/>
           </a:xfrm>
         </p:spPr>
@@ -4977,25 +4813,24 @@
           <a:p>
             <a:r>
               <a:rPr lang="ru-RU" dirty="0"/>
-              <a:t>ЛОГИЧЕСКАЯ МОДЕЛЬ </a:t>
-            </a:r>
-            <a:r>
-              <a:rPr lang="ru-RU" dirty="0" smtClean="0"/>
-              <a:t>ДАННЫХ</a:t>
-            </a:r>
-            <a:endParaRPr lang="ru-RU" dirty="0"/>
+              <a:t>концептуальная МОДЕЛЬ ДАННЫХ</a:t>
+            </a:r>
           </a:p>
         </p:txBody>
       </p:sp>
       <p:pic>
         <p:nvPicPr>
-          <p:cNvPr id="4" name="Объект 3"/>
+          <p:cNvPr id="6" name="Рисунок 5">
+            <a:extLst>
+              <a:ext uri="{FF2B5EF4-FFF2-40B4-BE49-F238E27FC236}">
+                <a16:creationId xmlns:a16="http://schemas.microsoft.com/office/drawing/2014/main" id="{DEFA1C51-B3CE-6088-3FFA-9A162F1B28F8}"/>
+              </a:ext>
+            </a:extLst>
+          </p:cNvPr>
           <p:cNvPicPr>
-            <a:picLocks noGrp="1"/>
+            <a:picLocks noChangeAspect="1"/>
           </p:cNvPicPr>
-          <p:nvPr>
-            <p:ph idx="1"/>
-          </p:nvPr>
+          <p:nvPr/>
         </p:nvPicPr>
         <p:blipFill>
           <a:blip r:embed="rId2"/>
@@ -5005,8 +4840,8 @@
         </p:blipFill>
         <p:spPr>
           <a:xfrm>
-            <a:off x="2629988" y="1776276"/>
-            <a:ext cx="6932023" cy="4676775"/>
+            <a:off x="2581378" y="1763177"/>
+            <a:ext cx="7029243" cy="4902417"/>
           </a:xfrm>
           <a:prstGeom prst="rect">
             <a:avLst/>
@@ -5016,20 +4851,13 @@
     </p:spTree>
     <p:extLst>
       <p:ext uri="{BB962C8B-B14F-4D97-AF65-F5344CB8AC3E}">
-        <p14:creationId xmlns:p14="http://schemas.microsoft.com/office/powerpoint/2010/main" val="1435294816"/>
+        <p14:creationId xmlns:p14="http://schemas.microsoft.com/office/powerpoint/2010/main" val="4283649580"/>
       </p:ext>
     </p:extLst>
   </p:cSld>
   <p:clrMapOvr>
     <a:masterClrMapping/>
   </p:clrMapOvr>
-  <p:timing>
-    <p:tnLst>
-      <p:par>
-        <p:cTn id="1" dur="indefinite" restart="never" nodeType="tmRoot"/>
-      </p:par>
-    </p:tnLst>
-  </p:timing>
 </p:sld>
 </file>
 
@@ -5062,7 +4890,7 @@
         </p:nvSpPr>
         <p:spPr>
           <a:xfrm>
-            <a:off x="2231135" y="578294"/>
+            <a:off x="2231135" y="404949"/>
             <a:ext cx="7729728" cy="1188720"/>
           </a:xfrm>
         </p:spPr>
@@ -5072,49 +4900,20 @@
           <a:p>
             <a:r>
               <a:rPr lang="ru-RU" dirty="0"/>
-              <a:t>АНАЛИТИЧЕСКИЕ ЗАПРОСЫ К БАЗЕ ДАННЫХ</a:t>
-            </a:r>
-          </a:p>
-        </p:txBody>
-      </p:sp>
-      <p:sp>
-        <p:nvSpPr>
-          <p:cNvPr id="3" name="Объект 2"/>
-          <p:cNvSpPr>
-            <a:spLocks noGrp="1"/>
-          </p:cNvSpPr>
-          <p:nvPr>
-            <p:ph idx="1"/>
-          </p:nvPr>
-        </p:nvSpPr>
-        <p:spPr>
-          <a:xfrm>
-            <a:off x="2231135" y="1927653"/>
-            <a:ext cx="7729728" cy="407315"/>
-          </a:xfrm>
-        </p:spPr>
-        <p:txBody>
-          <a:bodyPr>
-            <a:normAutofit/>
-          </a:bodyPr>
-          <a:lstStyle/>
-          <a:p>
-            <a:pPr marL="0" indent="0">
-              <a:buNone/>
-            </a:pPr>
-            <a:r>
-              <a:rPr lang="ru-RU" sz="2000" dirty="0"/>
-              <a:t>Фильтрация объектов недвижимости по типу и бюджету</a:t>
-            </a:r>
-            <a:endParaRPr lang="ru-RU" sz="2000" dirty="0"/>
+              <a:t>ЛОГИЧЕСКАЯ МОДЕЛЬ ДАННЫХ</a:t>
+            </a:r>
           </a:p>
         </p:txBody>
       </p:sp>
       <p:pic>
         <p:nvPicPr>
-          <p:cNvPr id="4" name="Рисунок 3"/>
-          <p:cNvPicPr/>
-          <p:nvPr/>
+          <p:cNvPr id="4" name="Объект 3"/>
+          <p:cNvPicPr>
+            <a:picLocks noGrp="1"/>
+          </p:cNvPicPr>
+          <p:nvPr>
+            <p:ph idx="1"/>
+          </p:nvPr>
         </p:nvPicPr>
         <p:blipFill>
           <a:blip r:embed="rId2"/>
@@ -5124,8 +4923,8 @@
         </p:blipFill>
         <p:spPr>
           <a:xfrm>
-            <a:off x="2018034" y="2495607"/>
-            <a:ext cx="8155931" cy="3781625"/>
+            <a:off x="2629988" y="1776276"/>
+            <a:ext cx="6932023" cy="4676775"/>
           </a:xfrm>
           <a:prstGeom prst="rect">
             <a:avLst/>
@@ -5135,20 +4934,13 @@
     </p:spTree>
     <p:extLst>
       <p:ext uri="{BB962C8B-B14F-4D97-AF65-F5344CB8AC3E}">
-        <p14:creationId xmlns:p14="http://schemas.microsoft.com/office/powerpoint/2010/main" val="2160442015"/>
+        <p14:creationId xmlns:p14="http://schemas.microsoft.com/office/powerpoint/2010/main" val="1435294816"/>
       </p:ext>
     </p:extLst>
   </p:cSld>
   <p:clrMapOvr>
     <a:masterClrMapping/>
   </p:clrMapOvr>
-  <p:timing>
-    <p:tnLst>
-      <p:par>
-        <p:cTn id="1" dur="indefinite" restart="never" nodeType="tmRoot"/>
-      </p:par>
-    </p:tnLst>
-  </p:timing>
 </p:sld>
 </file>
 
@@ -5171,7 +4963,7 @@
       </p:grpSpPr>
       <p:sp>
         <p:nvSpPr>
-          <p:cNvPr id="4" name="Заголовок 1"/>
+          <p:cNvPr id="2" name="Заголовок 1"/>
           <p:cNvSpPr>
             <a:spLocks noGrp="1"/>
           </p:cNvSpPr>
@@ -5181,7 +4973,7 @@
         </p:nvSpPr>
         <p:spPr>
           <a:xfrm>
-            <a:off x="2231135" y="510436"/>
+            <a:off x="2231135" y="578294"/>
             <a:ext cx="7729728" cy="1188720"/>
           </a:xfrm>
         </p:spPr>
@@ -5196,9 +4988,41 @@
           </a:p>
         </p:txBody>
       </p:sp>
+      <p:sp>
+        <p:nvSpPr>
+          <p:cNvPr id="3" name="Объект 2"/>
+          <p:cNvSpPr>
+            <a:spLocks noGrp="1"/>
+          </p:cNvSpPr>
+          <p:nvPr>
+            <p:ph idx="1"/>
+          </p:nvPr>
+        </p:nvSpPr>
+        <p:spPr>
+          <a:xfrm>
+            <a:off x="2231135" y="1927653"/>
+            <a:ext cx="7729728" cy="407315"/>
+          </a:xfrm>
+        </p:spPr>
+        <p:txBody>
+          <a:bodyPr>
+            <a:normAutofit/>
+          </a:bodyPr>
+          <a:lstStyle/>
+          <a:p>
+            <a:pPr marL="0" indent="0">
+              <a:buNone/>
+            </a:pPr>
+            <a:r>
+              <a:rPr lang="ru-RU" sz="2000" dirty="0"/>
+              <a:t>Фильтрация объектов недвижимости по типу и бюджету</a:t>
+            </a:r>
+          </a:p>
+        </p:txBody>
+      </p:sp>
       <p:pic>
         <p:nvPicPr>
-          <p:cNvPr id="5" name="Рисунок 4"/>
+          <p:cNvPr id="4" name="Рисунок 3"/>
           <p:cNvPicPr/>
           <p:nvPr/>
         </p:nvPicPr>
@@ -5210,68 +5034,24 @@
         </p:blipFill>
         <p:spPr>
           <a:xfrm>
-            <a:off x="1916697" y="2384652"/>
-            <a:ext cx="8358605" cy="3917294"/>
+            <a:off x="2018034" y="2495607"/>
+            <a:ext cx="8155931" cy="3781625"/>
           </a:xfrm>
           <a:prstGeom prst="rect">
             <a:avLst/>
           </a:prstGeom>
         </p:spPr>
       </p:pic>
-      <p:sp>
-        <p:nvSpPr>
-          <p:cNvPr id="6" name="Объект 2"/>
-          <p:cNvSpPr>
-            <a:spLocks noGrp="1"/>
-          </p:cNvSpPr>
-          <p:nvPr>
-            <p:ph idx="1"/>
-          </p:nvPr>
-        </p:nvSpPr>
-        <p:spPr>
-          <a:xfrm>
-            <a:off x="2231135" y="1853514"/>
-            <a:ext cx="7729728" cy="531138"/>
-          </a:xfrm>
-        </p:spPr>
-        <p:txBody>
-          <a:bodyPr>
-            <a:normAutofit/>
-          </a:bodyPr>
-          <a:lstStyle/>
-          <a:p>
-            <a:pPr marL="0" indent="0">
-              <a:buNone/>
-            </a:pPr>
-            <a:r>
-              <a:rPr lang="ru-RU" sz="2000" dirty="0"/>
-              <a:t>Расчёт средней рыночной стоимости по </a:t>
-            </a:r>
-            <a:r>
-              <a:rPr lang="ru-RU" sz="2000" dirty="0" smtClean="0"/>
-              <a:t>категориям</a:t>
-            </a:r>
-            <a:endParaRPr lang="ru-RU" sz="2000" dirty="0"/>
-          </a:p>
-        </p:txBody>
-      </p:sp>
     </p:spTree>
     <p:extLst>
       <p:ext uri="{BB962C8B-B14F-4D97-AF65-F5344CB8AC3E}">
-        <p14:creationId xmlns:p14="http://schemas.microsoft.com/office/powerpoint/2010/main" val="1051267570"/>
+        <p14:creationId xmlns:p14="http://schemas.microsoft.com/office/powerpoint/2010/main" val="2160442015"/>
       </p:ext>
     </p:extLst>
   </p:cSld>
   <p:clrMapOvr>
     <a:masterClrMapping/>
   </p:clrMapOvr>
-  <p:timing>
-    <p:tnLst>
-      <p:par>
-        <p:cTn id="1" dur="indefinite" restart="never" nodeType="tmRoot"/>
-      </p:par>
-    </p:tnLst>
-  </p:timing>
 </p:sld>
 </file>
 
@@ -5294,55 +5074,6 @@
       </p:grpSpPr>
       <p:sp>
         <p:nvSpPr>
-          <p:cNvPr id="3" name="Объект 2"/>
-          <p:cNvSpPr>
-            <a:spLocks noGrp="1"/>
-          </p:cNvSpPr>
-          <p:nvPr>
-            <p:ph idx="1"/>
-          </p:nvPr>
-        </p:nvSpPr>
-        <p:spPr>
-          <a:xfrm>
-            <a:off x="2231136" y="1969903"/>
-            <a:ext cx="7234397" cy="439665"/>
-          </a:xfrm>
-        </p:spPr>
-        <p:txBody>
-          <a:bodyPr>
-            <a:normAutofit/>
-          </a:bodyPr>
-          <a:lstStyle/>
-          <a:p>
-            <a:pPr marL="0" indent="0">
-              <a:buNone/>
-            </a:pPr>
-            <a:r>
-              <a:rPr lang="ru-RU" sz="2000" dirty="0" smtClean="0"/>
-              <a:t>Проверка </a:t>
-            </a:r>
-            <a:r>
-              <a:rPr lang="ru-RU" sz="2000" dirty="0" err="1"/>
-              <a:t>заполненности</a:t>
-            </a:r>
-            <a:r>
-              <a:rPr lang="ru-RU" sz="2000" dirty="0"/>
-              <a:t> </a:t>
-            </a:r>
-            <a:r>
-              <a:rPr lang="ru-RU" sz="2000" dirty="0" smtClean="0"/>
-              <a:t>паспортных </a:t>
-            </a:r>
-            <a:r>
-              <a:rPr lang="ru-RU" sz="2000" dirty="0"/>
-              <a:t>данных</a:t>
-            </a:r>
-            <a:endParaRPr lang="ru-RU" sz="2000" dirty="0"/>
-          </a:p>
-        </p:txBody>
-      </p:sp>
-      <p:sp>
-        <p:nvSpPr>
           <p:cNvPr id="4" name="Заголовок 1"/>
           <p:cNvSpPr>
             <a:spLocks noGrp="1"/>
@@ -5353,7 +5084,7 @@
         </p:nvSpPr>
         <p:spPr>
           <a:xfrm>
-            <a:off x="2231136" y="615120"/>
+            <a:off x="2231135" y="510436"/>
             <a:ext cx="7729728" cy="1188720"/>
           </a:xfrm>
         </p:spPr>
@@ -5362,12 +5093,8 @@
           <a:lstStyle/>
           <a:p>
             <a:r>
-              <a:rPr lang="ru-RU" dirty="0" smtClean="0"/>
-              <a:t>Проверочные </a:t>
-            </a:r>
-            <a:r>
               <a:rPr lang="ru-RU" dirty="0"/>
-              <a:t>ЗАПРОСЫ К БАЗЕ ДАННЫХ</a:t>
+              <a:t>АНАЛИТИЧЕСКИЕ ЗАПРОСЫ К БАЗЕ ДАННЫХ</a:t>
             </a:r>
           </a:p>
         </p:txBody>
@@ -5386,53 +5113,56 @@
         </p:blipFill>
         <p:spPr>
           <a:xfrm>
-            <a:off x="1748162" y="2575631"/>
-            <a:ext cx="8557373" cy="3392683"/>
+            <a:off x="1916697" y="2384652"/>
+            <a:ext cx="8358605" cy="3917294"/>
           </a:xfrm>
           <a:prstGeom prst="rect">
             <a:avLst/>
           </a:prstGeom>
         </p:spPr>
       </p:pic>
-      <p:pic>
-        <p:nvPicPr>
-          <p:cNvPr id="6" name="Рисунок 5"/>
-          <p:cNvPicPr/>
-          <p:nvPr/>
-        </p:nvPicPr>
-        <p:blipFill>
-          <a:blip r:embed="rId3"/>
-          <a:stretch>
-            <a:fillRect/>
-          </a:stretch>
-        </p:blipFill>
-        <p:spPr>
-          <a:xfrm>
-            <a:off x="1748162" y="2575631"/>
-            <a:ext cx="8557373" cy="598670"/>
-          </a:xfrm>
-          <a:prstGeom prst="rect">
-            <a:avLst/>
-          </a:prstGeom>
-        </p:spPr>
-      </p:pic>
+      <p:sp>
+        <p:nvSpPr>
+          <p:cNvPr id="6" name="Объект 2"/>
+          <p:cNvSpPr>
+            <a:spLocks noGrp="1"/>
+          </p:cNvSpPr>
+          <p:nvPr>
+            <p:ph idx="1"/>
+          </p:nvPr>
+        </p:nvSpPr>
+        <p:spPr>
+          <a:xfrm>
+            <a:off x="2231135" y="1853514"/>
+            <a:ext cx="7729728" cy="531138"/>
+          </a:xfrm>
+        </p:spPr>
+        <p:txBody>
+          <a:bodyPr>
+            <a:normAutofit/>
+          </a:bodyPr>
+          <a:lstStyle/>
+          <a:p>
+            <a:pPr marL="0" indent="0">
+              <a:buNone/>
+            </a:pPr>
+            <a:r>
+              <a:rPr lang="ru-RU" sz="2000" dirty="0"/>
+              <a:t>Расчёт средней рыночной стоимости по категориям</a:t>
+            </a:r>
+          </a:p>
+        </p:txBody>
+      </p:sp>
     </p:spTree>
     <p:extLst>
       <p:ext uri="{BB962C8B-B14F-4D97-AF65-F5344CB8AC3E}">
-        <p14:creationId xmlns:p14="http://schemas.microsoft.com/office/powerpoint/2010/main" val="3292762486"/>
+        <p14:creationId xmlns:p14="http://schemas.microsoft.com/office/powerpoint/2010/main" val="1051267570"/>
       </p:ext>
     </p:extLst>
   </p:cSld>
   <p:clrMapOvr>
     <a:masterClrMapping/>
   </p:clrMapOvr>
-  <p:timing>
-    <p:tnLst>
-      <p:par>
-        <p:cTn id="1" dur="indefinite" restart="never" nodeType="tmRoot"/>
-      </p:par>
-    </p:tnLst>
-  </p:timing>
 </p:sld>
 </file>
 
@@ -5455,7 +5185,47 @@
       </p:grpSpPr>
       <p:sp>
         <p:nvSpPr>
-          <p:cNvPr id="2" name="Заголовок 1"/>
+          <p:cNvPr id="3" name="Объект 2"/>
+          <p:cNvSpPr>
+            <a:spLocks noGrp="1"/>
+          </p:cNvSpPr>
+          <p:nvPr>
+            <p:ph idx="1"/>
+          </p:nvPr>
+        </p:nvSpPr>
+        <p:spPr>
+          <a:xfrm>
+            <a:off x="2231136" y="1969903"/>
+            <a:ext cx="7234397" cy="439665"/>
+          </a:xfrm>
+        </p:spPr>
+        <p:txBody>
+          <a:bodyPr>
+            <a:normAutofit/>
+          </a:bodyPr>
+          <a:lstStyle/>
+          <a:p>
+            <a:pPr marL="0" indent="0">
+              <a:buNone/>
+            </a:pPr>
+            <a:r>
+              <a:rPr lang="ru-RU" sz="2000" dirty="0"/>
+              <a:t>Проверка </a:t>
+            </a:r>
+            <a:r>
+              <a:rPr lang="ru-RU" sz="2000" dirty="0" err="1"/>
+              <a:t>заполненности</a:t>
+            </a:r>
+            <a:r>
+              <a:rPr lang="ru-RU" sz="2000" dirty="0"/>
+              <a:t> паспортных данных</a:t>
+            </a:r>
+          </a:p>
+        </p:txBody>
+      </p:sp>
+      <p:sp>
+        <p:nvSpPr>
+          <p:cNvPr id="4" name="Заголовок 1"/>
           <p:cNvSpPr>
             <a:spLocks noGrp="1"/>
           </p:cNvSpPr>
@@ -5465,7 +5235,7 @@
         </p:nvSpPr>
         <p:spPr>
           <a:xfrm>
-            <a:off x="2231136" y="424760"/>
+            <a:off x="2231136" y="615120"/>
             <a:ext cx="7729728" cy="1188720"/>
           </a:xfrm>
         </p:spPr>
@@ -5475,19 +5245,14 @@
           <a:p>
             <a:r>
               <a:rPr lang="ru-RU" dirty="0"/>
-              <a:t>ПОЛЬЗОВАТЕЛЬСКИЙ </a:t>
-            </a:r>
-            <a:r>
-              <a:rPr lang="ru-RU" dirty="0" smtClean="0"/>
-              <a:t>ИНТЕРФЕЙС</a:t>
-            </a:r>
-            <a:endParaRPr lang="ru-RU" dirty="0"/>
+              <a:t>Проверочные ЗАПРОСЫ К БАЗЕ ДАННЫХ</a:t>
+            </a:r>
           </a:p>
         </p:txBody>
       </p:sp>
       <p:pic>
         <p:nvPicPr>
-          <p:cNvPr id="4" name="Рисунок 3"/>
+          <p:cNvPr id="5" name="Рисунок 4"/>
           <p:cNvPicPr/>
           <p:nvPr/>
         </p:nvPicPr>
@@ -5499,8 +5264,30 @@
         </p:blipFill>
         <p:spPr>
           <a:xfrm>
-            <a:off x="2330836" y="1947966"/>
-            <a:ext cx="7530328" cy="4514618"/>
+            <a:off x="1748162" y="2575631"/>
+            <a:ext cx="8557373" cy="3392683"/>
+          </a:xfrm>
+          <a:prstGeom prst="rect">
+            <a:avLst/>
+          </a:prstGeom>
+        </p:spPr>
+      </p:pic>
+      <p:pic>
+        <p:nvPicPr>
+          <p:cNvPr id="6" name="Рисунок 5"/>
+          <p:cNvPicPr/>
+          <p:nvPr/>
+        </p:nvPicPr>
+        <p:blipFill>
+          <a:blip r:embed="rId3"/>
+          <a:stretch>
+            <a:fillRect/>
+          </a:stretch>
+        </p:blipFill>
+        <p:spPr>
+          <a:xfrm>
+            <a:off x="1748162" y="2575631"/>
+            <a:ext cx="8557373" cy="598670"/>
           </a:xfrm>
           <a:prstGeom prst="rect">
             <a:avLst/>
@@ -5510,20 +5297,13 @@
     </p:spTree>
     <p:extLst>
       <p:ext uri="{BB962C8B-B14F-4D97-AF65-F5344CB8AC3E}">
-        <p14:creationId xmlns:p14="http://schemas.microsoft.com/office/powerpoint/2010/main" val="1907778919"/>
+        <p14:creationId xmlns:p14="http://schemas.microsoft.com/office/powerpoint/2010/main" val="3292762486"/>
       </p:ext>
     </p:extLst>
   </p:cSld>
   <p:clrMapOvr>
     <a:masterClrMapping/>
   </p:clrMapOvr>
-  <p:timing>
-    <p:tnLst>
-      <p:par>
-        <p:cTn id="1" dur="indefinite" restart="never" nodeType="tmRoot"/>
-      </p:par>
-    </p:tnLst>
-  </p:timing>
 </p:sld>
 </file>
 
@@ -5565,10 +5345,9 @@
           <a:lstStyle/>
           <a:p>
             <a:r>
-              <a:rPr lang="ru-RU" dirty="0" smtClean="0"/>
+              <a:rPr lang="ru-RU" dirty="0"/>
               <a:t>Описание предметной области</a:t>
             </a:r>
-            <a:endParaRPr lang="ru-RU" dirty="0"/>
           </a:p>
         </p:txBody>
       </p:sp>
@@ -5599,20 +5378,15 @@
             </a:pPr>
             <a:r>
               <a:rPr lang="ru-RU" sz="2000" dirty="0"/>
-              <a:t>А</a:t>
-            </a:r>
-            <a:r>
-              <a:rPr lang="ru-RU" sz="2000" dirty="0" smtClean="0"/>
-              <a:t>гентство недвижимости – это компания предоставляющая услуги по проведению сделок купли-продажи объектов недвижимости, сдаче объектов в аренду на кратковременные или долговременные сроки. </a:t>
-            </a:r>
-            <a:endParaRPr lang="ru-RU" sz="2000" dirty="0"/>
+              <a:t>Агентство недвижимости – это компания предоставляющая услуги по проведению сделок купли-продажи объектов недвижимости, сдаче объектов в аренду на кратковременные или долговременные сроки. </a:t>
+            </a:r>
           </a:p>
           <a:p>
             <a:pPr marL="0" indent="0">
               <a:buNone/>
             </a:pPr>
             <a:r>
-              <a:rPr lang="ru-RU" sz="2000" dirty="0" smtClean="0"/>
+              <a:rPr lang="ru-RU" sz="2000" dirty="0"/>
               <a:t>Основные бизнес-процессы:</a:t>
             </a:r>
           </a:p>
@@ -5622,16 +5396,8 @@
               <a:buChar char="-"/>
             </a:pPr>
             <a:r>
-              <a:rPr lang="ru-RU" sz="2000" dirty="0" smtClean="0"/>
-              <a:t>Внесение данных </a:t>
-            </a:r>
-            <a:r>
               <a:rPr lang="ru-RU" sz="2000" dirty="0"/>
-              <a:t>клиентов и </a:t>
-            </a:r>
-            <a:r>
-              <a:rPr lang="ru-RU" sz="2000" dirty="0" smtClean="0"/>
-              <a:t>объектов</a:t>
+              <a:t>Внесение данных клиентов и объектов</a:t>
             </a:r>
           </a:p>
           <a:p>
@@ -5640,12 +5406,8 @@
               <a:buChar char="-"/>
             </a:pPr>
             <a:r>
-              <a:rPr lang="ru-RU" sz="2000" dirty="0" smtClean="0"/>
-              <a:t>Формирование </a:t>
-            </a:r>
-            <a:r>
               <a:rPr lang="ru-RU" sz="2000" dirty="0"/>
-              <a:t>и публикация объявлений на внешних площадках (</a:t>
+              <a:t>Формирование и публикация объявлений на внешних площадках (</a:t>
             </a:r>
             <a:r>
               <a:rPr lang="ru-RU" sz="2000" dirty="0" err="1"/>
@@ -5656,11 +5418,11 @@
               <a:t>, Циан, </a:t>
             </a:r>
             <a:r>
-              <a:rPr lang="ru-RU" sz="2000" dirty="0" err="1" smtClean="0"/>
+              <a:rPr lang="ru-RU" sz="2000" dirty="0" err="1"/>
               <a:t>Домклик</a:t>
             </a:r>
             <a:r>
-              <a:rPr lang="ru-RU" sz="2000" dirty="0" smtClean="0"/>
+              <a:rPr lang="ru-RU" sz="2000" dirty="0"/>
               <a:t>)</a:t>
             </a:r>
           </a:p>
@@ -5670,14 +5432,9 @@
               <a:buChar char="-"/>
             </a:pPr>
             <a:r>
-              <a:rPr lang="ru-RU" sz="2000" dirty="0" smtClean="0"/>
-              <a:t>Сопровождение </a:t>
-            </a:r>
-            <a:r>
               <a:rPr lang="ru-RU" sz="2000" dirty="0"/>
-              <a:t>сделок </a:t>
-            </a:r>
-            <a:endParaRPr lang="ru-RU" sz="2000" dirty="0" smtClean="0"/>
+              <a:t>Сопровождение сделок </a:t>
+            </a:r>
           </a:p>
           <a:p>
             <a:pPr>
@@ -5685,12 +5442,8 @@
               <a:buChar char="-"/>
             </a:pPr>
             <a:r>
-              <a:rPr lang="ru-RU" sz="2000" dirty="0" smtClean="0"/>
-              <a:t>Создание </a:t>
-            </a:r>
-            <a:r>
               <a:rPr lang="ru-RU" sz="2000" dirty="0"/>
-              <a:t>договоров купли-продажи</a:t>
+              <a:t>Создание договоров купли-продажи</a:t>
             </a:r>
           </a:p>
           <a:p>
@@ -5712,13 +5465,6 @@
   <p:clrMapOvr>
     <a:masterClrMapping/>
   </p:clrMapOvr>
-  <p:timing>
-    <p:tnLst>
-      <p:par>
-        <p:cTn id="1" dur="indefinite" restart="never" nodeType="tmRoot"/>
-      </p:par>
-    </p:tnLst>
-  </p:timing>
 </p:sld>
 </file>
 
@@ -5741,7 +5487,7 @@
       </p:grpSpPr>
       <p:sp>
         <p:nvSpPr>
-          <p:cNvPr id="4" name="Заголовок 1"/>
+          <p:cNvPr id="2" name="Заголовок 1"/>
           <p:cNvSpPr>
             <a:spLocks noGrp="1"/>
           </p:cNvSpPr>
@@ -5751,7 +5497,7 @@
         </p:nvSpPr>
         <p:spPr>
           <a:xfrm>
-            <a:off x="2231136" y="608700"/>
+            <a:off x="2231136" y="424760"/>
             <a:ext cx="7729728" cy="1188720"/>
           </a:xfrm>
         </p:spPr>
@@ -5761,25 +5507,16 @@
           <a:p>
             <a:r>
               <a:rPr lang="ru-RU" dirty="0"/>
-              <a:t>ПОЛЬЗОВАТЕЛЬСКИЙ </a:t>
-            </a:r>
-            <a:r>
-              <a:rPr lang="ru-RU" dirty="0" smtClean="0"/>
-              <a:t>ИНТЕРФЕЙС</a:t>
-            </a:r>
-            <a:endParaRPr lang="ru-RU" dirty="0"/>
+              <a:t>ПОЛЬЗОВАТЕЛЬСКИЙ ИНТЕРФЕЙС</a:t>
+            </a:r>
           </a:p>
         </p:txBody>
       </p:sp>
       <p:pic>
         <p:nvPicPr>
-          <p:cNvPr id="5" name="Объект 4"/>
-          <p:cNvPicPr>
-            <a:picLocks noGrp="1"/>
-          </p:cNvPicPr>
-          <p:nvPr>
-            <p:ph idx="1"/>
-          </p:nvPr>
+          <p:cNvPr id="4" name="Рисунок 3"/>
+          <p:cNvPicPr/>
+          <p:nvPr/>
         </p:nvPicPr>
         <p:blipFill>
           <a:blip r:embed="rId2"/>
@@ -5789,30 +5526,8 @@
         </p:blipFill>
         <p:spPr>
           <a:xfrm>
-            <a:off x="6133071" y="2355737"/>
-            <a:ext cx="5940425" cy="3716020"/>
-          </a:xfrm>
-          <a:prstGeom prst="rect">
-            <a:avLst/>
-          </a:prstGeom>
-        </p:spPr>
-      </p:pic>
-      <p:pic>
-        <p:nvPicPr>
-          <p:cNvPr id="6" name="Рисунок 5"/>
-          <p:cNvPicPr/>
-          <p:nvPr/>
-        </p:nvPicPr>
-        <p:blipFill>
-          <a:blip r:embed="rId3"/>
-          <a:stretch>
-            <a:fillRect/>
-          </a:stretch>
-        </p:blipFill>
-        <p:spPr>
-          <a:xfrm>
-            <a:off x="93790" y="2355737"/>
-            <a:ext cx="5940425" cy="3716020"/>
+            <a:off x="2330836" y="1947966"/>
+            <a:ext cx="7530328" cy="4514618"/>
           </a:xfrm>
           <a:prstGeom prst="rect">
             <a:avLst/>
@@ -5822,20 +5537,13 @@
     </p:spTree>
     <p:extLst>
       <p:ext uri="{BB962C8B-B14F-4D97-AF65-F5344CB8AC3E}">
-        <p14:creationId xmlns:p14="http://schemas.microsoft.com/office/powerpoint/2010/main" val="1509992199"/>
+        <p14:creationId xmlns:p14="http://schemas.microsoft.com/office/powerpoint/2010/main" val="1907778919"/>
       </p:ext>
     </p:extLst>
   </p:cSld>
   <p:clrMapOvr>
     <a:masterClrMapping/>
   </p:clrMapOvr>
-  <p:timing>
-    <p:tnLst>
-      <p:par>
-        <p:cTn id="1" dur="indefinite" restart="never" nodeType="tmRoot"/>
-      </p:par>
-    </p:tnLst>
-  </p:timing>
 </p:sld>
 </file>
 
@@ -5858,7 +5566,7 @@
       </p:grpSpPr>
       <p:sp>
         <p:nvSpPr>
-          <p:cNvPr id="2" name="Заголовок 1"/>
+          <p:cNvPr id="4" name="Заголовок 1"/>
           <p:cNvSpPr>
             <a:spLocks noGrp="1"/>
           </p:cNvSpPr>
@@ -5868,7 +5576,7 @@
         </p:nvSpPr>
         <p:spPr>
           <a:xfrm>
-            <a:off x="2121984" y="458065"/>
+            <a:off x="2231136" y="608700"/>
             <a:ext cx="7729728" cy="1188720"/>
           </a:xfrm>
         </p:spPr>
@@ -5877,144 +5585,70 @@
           <a:lstStyle/>
           <a:p>
             <a:r>
-              <a:rPr lang="ru-RU" dirty="0" smtClean="0"/>
-              <a:t>Заключение</a:t>
-            </a:r>
-            <a:endParaRPr lang="ru-RU" dirty="0"/>
-          </a:p>
-        </p:txBody>
-      </p:sp>
-      <p:sp>
-        <p:nvSpPr>
-          <p:cNvPr id="3" name="Объект 2"/>
-          <p:cNvSpPr>
-            <a:spLocks noGrp="1"/>
-          </p:cNvSpPr>
+              <a:rPr lang="ru-RU" dirty="0"/>
+              <a:t>ПОЛЬЗОВАТЕЛЬСКИЙ ИНТЕРФЕЙС</a:t>
+            </a:r>
+          </a:p>
+        </p:txBody>
+      </p:sp>
+      <p:pic>
+        <p:nvPicPr>
+          <p:cNvPr id="5" name="Объект 4"/>
+          <p:cNvPicPr>
+            <a:picLocks noGrp="1"/>
+          </p:cNvPicPr>
           <p:nvPr>
             <p:ph idx="1"/>
           </p:nvPr>
-        </p:nvSpPr>
-        <p:spPr>
-          <a:xfrm>
-            <a:off x="1458097" y="1902941"/>
-            <a:ext cx="9316995" cy="4522573"/>
-          </a:xfrm>
-        </p:spPr>
-        <p:txBody>
-          <a:bodyPr>
-            <a:noAutofit/>
-          </a:bodyPr>
-          <a:lstStyle/>
-          <a:p>
-            <a:pPr marL="0" indent="0" algn="just">
-              <a:buNone/>
-            </a:pPr>
-            <a:r>
-              <a:rPr lang="ru-RU" sz="2000" dirty="0" smtClean="0">
-                <a:ea typeface="Times New Roman" panose="02020603050405020304" pitchFamily="18" charset="0"/>
-              </a:rPr>
-              <a:t>	В </a:t>
-            </a:r>
-            <a:r>
-              <a:rPr lang="ru-RU" sz="2000" dirty="0">
-                <a:ea typeface="Times New Roman" panose="02020603050405020304" pitchFamily="18" charset="0"/>
-              </a:rPr>
-              <a:t>заключение курсового проекта по теме «Проектирование ИС «Агентство недвижимости»» можно утвердить, что была разработана система, предоставляющая </a:t>
-            </a:r>
-            <a:r>
-              <a:rPr lang="ru-RU" sz="2000" dirty="0" smtClean="0">
-                <a:ea typeface="Times New Roman" panose="02020603050405020304" pitchFamily="18" charset="0"/>
-              </a:rPr>
-              <a:t>агентам(риелторам) </a:t>
-            </a:r>
-            <a:r>
-              <a:rPr lang="ru-RU" sz="2000" dirty="0">
-                <a:ea typeface="Times New Roman" panose="02020603050405020304" pitchFamily="18" charset="0"/>
-              </a:rPr>
-              <a:t>возможность </a:t>
-            </a:r>
-            <a:r>
-              <a:rPr lang="ru-RU" sz="2000" dirty="0" smtClean="0">
-                <a:ea typeface="Times New Roman" panose="02020603050405020304" pitchFamily="18" charset="0"/>
-              </a:rPr>
-              <a:t>подбора объектов/клиентов, проведения сделки, хранения данных, генерации договоров/объявлений с </a:t>
-            </a:r>
-            <a:r>
-              <a:rPr lang="ru-RU" sz="2000" dirty="0">
-                <a:ea typeface="Times New Roman" panose="02020603050405020304" pitchFamily="18" charset="0"/>
-              </a:rPr>
-              <a:t>использованием </a:t>
-            </a:r>
-            <a:r>
-              <a:rPr lang="ru-RU" sz="2000" dirty="0" smtClean="0">
-                <a:ea typeface="Times New Roman" panose="02020603050405020304" pitchFamily="18" charset="0"/>
-              </a:rPr>
-              <a:t>информационной системы. </a:t>
-            </a:r>
-          </a:p>
-          <a:p>
-            <a:pPr marL="0" indent="0" algn="just">
-              <a:buNone/>
-            </a:pPr>
-            <a:r>
-              <a:rPr lang="ru-RU" sz="2000" dirty="0" smtClean="0">
-                <a:ea typeface="Times New Roman" panose="02020603050405020304" pitchFamily="18" charset="0"/>
-              </a:rPr>
-              <a:t>	Разработка </a:t>
-            </a:r>
-            <a:r>
-              <a:rPr lang="ru-RU" sz="2000" dirty="0">
-                <a:ea typeface="Times New Roman" panose="02020603050405020304" pitchFamily="18" charset="0"/>
-              </a:rPr>
-              <a:t>этой информационной системы представляет собой важный шаг в сфере недвижимости, обеспечивая агентам(риелторам) удобный и доступный способ ведения учета объектов, клиентов, сделок, а также обеспечивает устойчивое конкурентное преимущество, снижение операционных издержек и переход к </a:t>
-            </a:r>
-            <a:r>
-              <a:rPr lang="ru-RU" sz="2000" dirty="0" err="1" smtClean="0">
-                <a:ea typeface="Times New Roman" panose="02020603050405020304" pitchFamily="18" charset="0"/>
-              </a:rPr>
-              <a:t>клиентоориентированной</a:t>
-            </a:r>
-            <a:r>
-              <a:rPr lang="ru-RU" sz="2000" dirty="0" smtClean="0">
-                <a:ea typeface="Times New Roman" panose="02020603050405020304" pitchFamily="18" charset="0"/>
-              </a:rPr>
-              <a:t> </a:t>
-            </a:r>
-            <a:r>
-              <a:rPr lang="ru-RU" sz="2000" dirty="0">
-                <a:ea typeface="Times New Roman" panose="02020603050405020304" pitchFamily="18" charset="0"/>
-              </a:rPr>
-              <a:t>модели </a:t>
-            </a:r>
-            <a:r>
-              <a:rPr lang="ru-RU" sz="2000" dirty="0" smtClean="0">
-                <a:ea typeface="Times New Roman" panose="02020603050405020304" pitchFamily="18" charset="0"/>
-              </a:rPr>
-              <a:t>обслуживания.</a:t>
-            </a:r>
-            <a:endParaRPr lang="ru-RU" sz="2000" dirty="0" smtClean="0">
-              <a:ea typeface="Times New Roman" panose="02020603050405020304" pitchFamily="18" charset="0"/>
-            </a:endParaRPr>
-          </a:p>
-        </p:txBody>
-      </p:sp>
+        </p:nvPicPr>
+        <p:blipFill>
+          <a:blip r:embed="rId2"/>
+          <a:stretch>
+            <a:fillRect/>
+          </a:stretch>
+        </p:blipFill>
+        <p:spPr>
+          <a:xfrm>
+            <a:off x="6133071" y="2355737"/>
+            <a:ext cx="5940425" cy="3716020"/>
+          </a:xfrm>
+          <a:prstGeom prst="rect">
+            <a:avLst/>
+          </a:prstGeom>
+        </p:spPr>
+      </p:pic>
+      <p:pic>
+        <p:nvPicPr>
+          <p:cNvPr id="6" name="Рисунок 5"/>
+          <p:cNvPicPr/>
+          <p:nvPr/>
+        </p:nvPicPr>
+        <p:blipFill>
+          <a:blip r:embed="rId3"/>
+          <a:stretch>
+            <a:fillRect/>
+          </a:stretch>
+        </p:blipFill>
+        <p:spPr>
+          <a:xfrm>
+            <a:off x="93790" y="2355737"/>
+            <a:ext cx="5940425" cy="3716020"/>
+          </a:xfrm>
+          <a:prstGeom prst="rect">
+            <a:avLst/>
+          </a:prstGeom>
+        </p:spPr>
+      </p:pic>
     </p:spTree>
     <p:extLst>
       <p:ext uri="{BB962C8B-B14F-4D97-AF65-F5344CB8AC3E}">
-        <p14:creationId xmlns:p14="http://schemas.microsoft.com/office/powerpoint/2010/main" val="1814063874"/>
+        <p14:creationId xmlns:p14="http://schemas.microsoft.com/office/powerpoint/2010/main" val="1509992199"/>
       </p:ext>
     </p:extLst>
   </p:cSld>
   <p:clrMapOvr>
     <a:masterClrMapping/>
   </p:clrMapOvr>
-  <p:timing>
-    <p:tnLst>
-      <p:par>
-        <p:cTn id="1" dur="indefinite" restart="never" nodeType="tmRoot"/>
-      </p:par>
-    </p:tnLst>
-  </p:timing>
 </p:sld>
 </file>
 
@@ -6037,6 +5671,120 @@
       </p:grpSpPr>
       <p:sp>
         <p:nvSpPr>
+          <p:cNvPr id="2" name="Заголовок 1"/>
+          <p:cNvSpPr>
+            <a:spLocks noGrp="1"/>
+          </p:cNvSpPr>
+          <p:nvPr>
+            <p:ph type="title"/>
+          </p:nvPr>
+        </p:nvSpPr>
+        <p:spPr>
+          <a:xfrm>
+            <a:off x="2121984" y="458065"/>
+            <a:ext cx="7729728" cy="1188720"/>
+          </a:xfrm>
+        </p:spPr>
+        <p:txBody>
+          <a:bodyPr/>
+          <a:lstStyle/>
+          <a:p>
+            <a:r>
+              <a:rPr lang="ru-RU" dirty="0"/>
+              <a:t>Заключение</a:t>
+            </a:r>
+          </a:p>
+        </p:txBody>
+      </p:sp>
+      <p:sp>
+        <p:nvSpPr>
+          <p:cNvPr id="3" name="Объект 2"/>
+          <p:cNvSpPr>
+            <a:spLocks noGrp="1"/>
+          </p:cNvSpPr>
+          <p:nvPr>
+            <p:ph idx="1"/>
+          </p:nvPr>
+        </p:nvSpPr>
+        <p:spPr>
+          <a:xfrm>
+            <a:off x="1458097" y="1902941"/>
+            <a:ext cx="9316995" cy="4522573"/>
+          </a:xfrm>
+        </p:spPr>
+        <p:txBody>
+          <a:bodyPr>
+            <a:noAutofit/>
+          </a:bodyPr>
+          <a:lstStyle/>
+          <a:p>
+            <a:pPr marL="0" indent="0" algn="just">
+              <a:buNone/>
+            </a:pPr>
+            <a:r>
+              <a:rPr lang="ru-RU" sz="2000" dirty="0">
+                <a:ea typeface="Times New Roman" panose="02020603050405020304" pitchFamily="18" charset="0"/>
+              </a:rPr>
+              <a:t>	В заключение курсового проекта по теме «Проектирование ИС «Агентство недвижимости»» можно утвердить, что была разработана система, предоставляющая агентам(риелторам) возможность подбора объектов/клиентов, проведения сделки, хранения данных, генерации договоров/объявлений с использованием информационной системы. </a:t>
+            </a:r>
+          </a:p>
+          <a:p>
+            <a:pPr marL="0" indent="0" algn="just">
+              <a:buNone/>
+            </a:pPr>
+            <a:r>
+              <a:rPr lang="ru-RU" sz="2000" dirty="0">
+                <a:ea typeface="Times New Roman" panose="02020603050405020304" pitchFamily="18" charset="0"/>
+              </a:rPr>
+              <a:t>	Разработка этой информационной системы представляет собой важный шаг в сфере недвижимости, обеспечивая агентам(риелторам) удобный и доступный способ ведения учета объектов, клиентов, сделок, а также обеспечивает устойчивое конкурентное преимущество, снижение операционных издержек и переход к </a:t>
+            </a:r>
+            <a:r>
+              <a:rPr lang="ru-RU" sz="2000" dirty="0" err="1">
+                <a:ea typeface="Times New Roman" panose="02020603050405020304" pitchFamily="18" charset="0"/>
+              </a:rPr>
+              <a:t>клиентоориентированной</a:t>
+            </a:r>
+            <a:r>
+              <a:rPr lang="ru-RU" sz="2000" dirty="0">
+                <a:ea typeface="Times New Roman" panose="02020603050405020304" pitchFamily="18" charset="0"/>
+              </a:rPr>
+              <a:t> модели обслуживания.</a:t>
+            </a:r>
+          </a:p>
+        </p:txBody>
+      </p:sp>
+    </p:spTree>
+    <p:extLst>
+      <p:ext uri="{BB962C8B-B14F-4D97-AF65-F5344CB8AC3E}">
+        <p14:creationId xmlns:p14="http://schemas.microsoft.com/office/powerpoint/2010/main" val="1814063874"/>
+      </p:ext>
+    </p:extLst>
+  </p:cSld>
+  <p:clrMapOvr>
+    <a:masterClrMapping/>
+  </p:clrMapOvr>
+</p:sld>
+</file>
+
+<file path=ppt/slides/slide23.xml><?xml version="1.0" encoding="utf-8"?>
+<p:sld xmlns:a="http://schemas.openxmlformats.org/drawingml/2006/main" xmlns:r="http://schemas.openxmlformats.org/officeDocument/2006/relationships" xmlns:p="http://schemas.openxmlformats.org/presentationml/2006/main">
+  <p:cSld>
+    <p:spTree>
+      <p:nvGrpSpPr>
+        <p:cNvPr id="1" name=""/>
+        <p:cNvGrpSpPr/>
+        <p:nvPr/>
+      </p:nvGrpSpPr>
+      <p:grpSpPr>
+        <a:xfrm>
+          <a:off x="0" y="0"/>
+          <a:ext cx="0" cy="0"/>
+          <a:chOff x="0" y="0"/>
+          <a:chExt cx="0" cy="0"/>
+        </a:xfrm>
+      </p:grpSpPr>
+      <p:sp>
+        <p:nvSpPr>
           <p:cNvPr id="4" name="Заголовок 3"/>
           <p:cNvSpPr>
             <a:spLocks noGrp="1"/>
@@ -6056,10 +5804,9 @@
           <a:lstStyle/>
           <a:p>
             <a:r>
-              <a:rPr lang="ru-RU" dirty="0" smtClean="0"/>
+              <a:rPr lang="ru-RU" dirty="0"/>
               <a:t>Спасибо за внимание!</a:t>
             </a:r>
-            <a:endParaRPr lang="ru-RU" dirty="0"/>
           </a:p>
         </p:txBody>
       </p:sp>
@@ -6073,13 +5820,6 @@
   <p:clrMapOvr>
     <a:masterClrMapping/>
   </p:clrMapOvr>
-  <p:timing>
-    <p:tnLst>
-      <p:par>
-        <p:cTn id="1" dur="indefinite" restart="never" nodeType="tmRoot"/>
-      </p:par>
-    </p:tnLst>
-  </p:timing>
 </p:sld>
 </file>
 
@@ -6121,10 +5861,9 @@
           <a:lstStyle/>
           <a:p>
             <a:r>
-              <a:rPr lang="ru-RU" dirty="0" smtClean="0"/>
+              <a:rPr lang="ru-RU" dirty="0"/>
               <a:t>Проблематика</a:t>
             </a:r>
-            <a:endParaRPr lang="ru-RU" dirty="0"/>
           </a:p>
         </p:txBody>
       </p:sp>
@@ -6155,35 +5894,19 @@
               <a:buChar char="-"/>
             </a:pPr>
             <a:r>
-              <a:rPr lang="ru-RU" sz="2000" dirty="0" smtClean="0"/>
-              <a:t>Ручной </a:t>
-            </a:r>
-            <a:r>
               <a:rPr lang="ru-RU" sz="2000" dirty="0"/>
-              <a:t>ввод </a:t>
-            </a:r>
-            <a:r>
-              <a:rPr lang="ru-RU" sz="2000" dirty="0" smtClean="0"/>
-              <a:t>данных</a:t>
-            </a:r>
-            <a:r>
-              <a:rPr lang="en-US" sz="2000" dirty="0" smtClean="0"/>
+              <a:t>Ручной ввод данных</a:t>
+            </a:r>
+            <a:r>
+              <a:rPr lang="en-US" sz="2000" dirty="0"/>
               <a:t>(</a:t>
             </a:r>
             <a:r>
-              <a:rPr lang="ru-RU" sz="2000" dirty="0" smtClean="0"/>
-              <a:t>юридические </a:t>
-            </a:r>
-            <a:r>
               <a:rPr lang="ru-RU" sz="2000" dirty="0"/>
-              <a:t>ошибки, опечатки в паспортах и </a:t>
-            </a:r>
-            <a:r>
-              <a:rPr lang="ru-RU" sz="2000" dirty="0" smtClean="0"/>
-              <a:t>реквизитах</a:t>
-            </a:r>
-            <a:r>
-              <a:rPr lang="en-US" sz="2000" dirty="0" smtClean="0"/>
+              <a:t>юридические ошибки, опечатки в паспортах и реквизитах</a:t>
+            </a:r>
+            <a:r>
+              <a:rPr lang="en-US" sz="2000" dirty="0"/>
               <a:t>)</a:t>
             </a:r>
           </a:p>
@@ -6193,27 +5916,19 @@
               <a:buChar char="-"/>
             </a:pPr>
             <a:r>
-              <a:rPr lang="ru-RU" sz="2000" dirty="0" smtClean="0"/>
+              <a:rPr lang="ru-RU" sz="2000" dirty="0"/>
               <a:t>Дублирование операций</a:t>
             </a:r>
             <a:r>
-              <a:rPr lang="en-US" sz="2000" dirty="0" smtClean="0"/>
+              <a:rPr lang="en-US" sz="2000" dirty="0"/>
               <a:t>(</a:t>
             </a:r>
             <a:r>
-              <a:rPr lang="ru-RU" sz="2000" dirty="0" smtClean="0"/>
-              <a:t>многократное </a:t>
-            </a:r>
-            <a:r>
               <a:rPr lang="ru-RU" sz="2000" dirty="0"/>
-              <a:t>размещение объявлений на разных сайтах отнимает </a:t>
-            </a:r>
-            <a:r>
-              <a:rPr lang="ru-RU" sz="2000" dirty="0" smtClean="0"/>
-              <a:t>время</a:t>
-            </a:r>
-            <a:r>
-              <a:rPr lang="en-US" sz="2000" dirty="0" smtClean="0"/>
+              <a:t>многократное размещение объявлений на разных сайтах отнимает время</a:t>
+            </a:r>
+            <a:r>
+              <a:rPr lang="en-US" sz="2000" dirty="0"/>
               <a:t>)</a:t>
             </a:r>
           </a:p>
@@ -6223,35 +5938,19 @@
               <a:buChar char="-"/>
             </a:pPr>
             <a:r>
-              <a:rPr lang="ru-RU" sz="2000" dirty="0" smtClean="0"/>
-              <a:t>Отсутствие </a:t>
-            </a:r>
-            <a:r>
               <a:rPr lang="ru-RU" sz="2000" dirty="0"/>
-              <a:t>единой </a:t>
-            </a:r>
-            <a:r>
-              <a:rPr lang="ru-RU" sz="2000" dirty="0" smtClean="0"/>
-              <a:t>базы</a:t>
-            </a:r>
-            <a:r>
-              <a:rPr lang="en-US" sz="2000" dirty="0" smtClean="0"/>
+              <a:t>Отсутствие единой базы</a:t>
+            </a:r>
+            <a:r>
+              <a:rPr lang="en-US" sz="2000" dirty="0"/>
               <a:t>(</a:t>
             </a:r>
             <a:r>
-              <a:rPr lang="ru-RU" sz="2000" dirty="0" smtClean="0"/>
-              <a:t>низкая </a:t>
-            </a:r>
-            <a:r>
               <a:rPr lang="ru-RU" sz="2000" dirty="0"/>
-              <a:t>прозрачность процессов, сложный поиск нужных </a:t>
-            </a:r>
-            <a:r>
-              <a:rPr lang="ru-RU" sz="2000" dirty="0" smtClean="0"/>
-              <a:t>вариантов</a:t>
-            </a:r>
-            <a:r>
-              <a:rPr lang="en-US" sz="2000" dirty="0" smtClean="0"/>
+              <a:t>низкая прозрачность процессов, сложный поиск нужных вариантов</a:t>
+            </a:r>
+            <a:r>
+              <a:rPr lang="en-US" sz="2000" dirty="0"/>
               <a:t>)</a:t>
             </a:r>
           </a:p>
@@ -6261,35 +5960,19 @@
               <a:buChar char="-"/>
             </a:pPr>
             <a:r>
-              <a:rPr lang="ru-RU" sz="2000" dirty="0" smtClean="0"/>
-              <a:t>Нет </a:t>
-            </a:r>
-            <a:r>
               <a:rPr lang="ru-RU" sz="2000" dirty="0"/>
-              <a:t>системы </a:t>
-            </a:r>
-            <a:r>
-              <a:rPr lang="ru-RU" sz="2000" dirty="0" smtClean="0"/>
-              <a:t>уведомлений</a:t>
-            </a:r>
-            <a:r>
-              <a:rPr lang="en-US" sz="2000" dirty="0" smtClean="0"/>
+              <a:t>Нет системы уведомлений</a:t>
+            </a:r>
+            <a:r>
+              <a:rPr lang="en-US" sz="2000" dirty="0"/>
               <a:t>(</a:t>
             </a:r>
             <a:r>
-              <a:rPr lang="ru-RU" sz="2000" dirty="0" smtClean="0"/>
-              <a:t>риск </a:t>
-            </a:r>
-            <a:r>
               <a:rPr lang="ru-RU" sz="2000" dirty="0"/>
-              <a:t>упустить клиента или забыть о следующем этапе </a:t>
-            </a:r>
-            <a:r>
-              <a:rPr lang="ru-RU" sz="2000" dirty="0" smtClean="0"/>
-              <a:t>сделки</a:t>
-            </a:r>
-            <a:r>
-              <a:rPr lang="en-US" sz="2000" dirty="0" smtClean="0"/>
+              <a:t>риск упустить клиента или забыть о следующем этапе сделки</a:t>
+            </a:r>
+            <a:r>
+              <a:rPr lang="en-US" sz="2000" dirty="0"/>
               <a:t>)</a:t>
             </a:r>
           </a:p>
@@ -6305,13 +5988,6 @@
   <p:clrMapOvr>
     <a:masterClrMapping/>
   </p:clrMapOvr>
-  <p:timing>
-    <p:tnLst>
-      <p:par>
-        <p:cTn id="1" dur="indefinite" restart="never" nodeType="tmRoot"/>
-      </p:par>
-    </p:tnLst>
-  </p:timing>
 </p:sld>
 </file>
 
@@ -6353,10 +6029,9 @@
           <a:lstStyle/>
           <a:p>
             <a:r>
-              <a:rPr lang="ru-RU" dirty="0" smtClean="0"/>
+              <a:rPr lang="ru-RU" dirty="0"/>
               <a:t>Цели и задачи</a:t>
             </a:r>
-            <a:endParaRPr lang="ru-RU" dirty="0"/>
           </a:p>
         </p:txBody>
       </p:sp>
@@ -6451,15 +6126,7 @@
             </a:pPr>
             <a:r>
               <a:rPr lang="ru-RU" sz="2800" dirty="0"/>
-              <a:t>Провести анализ предметной области </a:t>
-            </a:r>
-            <a:r>
-              <a:rPr lang="ru-RU" sz="2800" dirty="0" smtClean="0"/>
-              <a:t>и </a:t>
-            </a:r>
-            <a:r>
-              <a:rPr lang="ru-RU" sz="2800" dirty="0"/>
-              <a:t>обосновать реинжиниринг</a:t>
+              <a:t>Провести анализ предметной области и обосновать реинжиниринг</a:t>
             </a:r>
           </a:p>
           <a:p>
@@ -6471,7 +6138,7 @@
               <a:rPr lang="ru-RU" sz="2800" dirty="0"/>
               <a:t>Разработать функциональные требования и смоделировать процессы </a:t>
             </a:r>
-            <a:endParaRPr lang="en-US" sz="2800" dirty="0" smtClean="0"/>
+            <a:endParaRPr lang="en-US" sz="2800" dirty="0"/>
           </a:p>
           <a:p>
             <a:pPr marL="457200" indent="-457200">
@@ -6479,12 +6146,8 @@
               <a:buAutoNum type="arabicPeriod"/>
             </a:pPr>
             <a:r>
-              <a:rPr lang="ru-RU" sz="2800" dirty="0" smtClean="0"/>
-              <a:t>Спроектировать </a:t>
-            </a:r>
-            <a:r>
               <a:rPr lang="ru-RU" sz="2800" dirty="0"/>
-              <a:t>структуру нормализованной реляционной базы данных</a:t>
+              <a:t>Спроектировать структуру нормализованной реляционной базы данных</a:t>
             </a:r>
           </a:p>
           <a:p>
@@ -6496,7 +6159,7 @@
               <a:rPr lang="ru-RU" sz="2800" dirty="0"/>
               <a:t>Выбрать оптимальный стек технологий </a:t>
             </a:r>
-            <a:endParaRPr lang="en-US" sz="2800" dirty="0" smtClean="0"/>
+            <a:endParaRPr lang="en-US" sz="2800" dirty="0"/>
           </a:p>
           <a:p>
             <a:pPr marL="457200" indent="-457200">
@@ -6504,12 +6167,8 @@
               <a:buAutoNum type="arabicPeriod"/>
             </a:pPr>
             <a:r>
-              <a:rPr lang="ru-RU" sz="2800" dirty="0" smtClean="0"/>
-              <a:t>Разработать </a:t>
-            </a:r>
-            <a:r>
               <a:rPr lang="ru-RU" sz="2800" dirty="0"/>
-              <a:t>эргономичный пользовательский интерфейс</a:t>
+              <a:t>Разработать эргономичный пользовательский интерфейс</a:t>
             </a:r>
           </a:p>
           <a:p>
@@ -6550,13 +6209,6 @@
   <p:clrMapOvr>
     <a:masterClrMapping/>
   </p:clrMapOvr>
-  <p:timing>
-    <p:tnLst>
-      <p:par>
-        <p:cTn id="1" dur="indefinite" restart="never" nodeType="tmRoot"/>
-      </p:par>
-    </p:tnLst>
-  </p:timing>
 </p:sld>
 </file>
 
@@ -6599,13 +6251,8 @@
             </a:pPr>
             <a:r>
               <a:rPr lang="ru-RU" sz="2000" dirty="0"/>
-              <a:t>Объект исследования</a:t>
-            </a:r>
-            <a:r>
-              <a:rPr lang="ru-RU" sz="2000" dirty="0" smtClean="0"/>
-              <a:t>:</a:t>
-            </a:r>
-            <a:endParaRPr lang="ru-RU" sz="2000" dirty="0"/>
+              <a:t>Объект исследования:</a:t>
+            </a:r>
           </a:p>
         </p:txBody>
       </p:sp>
@@ -6700,13 +6347,8 @@
           <a:p>
             <a:r>
               <a:rPr lang="ru-RU" sz="2000" dirty="0"/>
-              <a:t>Предмет исследования</a:t>
-            </a:r>
-            <a:r>
-              <a:rPr lang="ru-RU" sz="2000" dirty="0" smtClean="0"/>
-              <a:t>:</a:t>
-            </a:r>
-            <a:endParaRPr lang="ru-RU" sz="2000" dirty="0"/>
+              <a:t>Предмет исследования:</a:t>
+            </a:r>
           </a:p>
         </p:txBody>
       </p:sp>
@@ -6726,10 +6368,9 @@
           <a:lstStyle/>
           <a:p>
             <a:r>
-              <a:rPr lang="ru-RU" dirty="0" smtClean="0"/>
+              <a:rPr lang="ru-RU" dirty="0"/>
               <a:t>Объект и предмет исследования</a:t>
             </a:r>
-            <a:endParaRPr lang="ru-RU" dirty="0"/>
           </a:p>
         </p:txBody>
       </p:sp>
@@ -6743,13 +6384,6 @@
   <p:clrMapOvr>
     <a:masterClrMapping/>
   </p:clrMapOvr>
-  <p:timing>
-    <p:tnLst>
-      <p:par>
-        <p:cTn id="1" dur="indefinite" restart="never" nodeType="tmRoot"/>
-      </p:par>
-    </p:tnLst>
-  </p:timing>
 </p:sld>
 </file>
 
@@ -6797,22 +6431,21 @@
               <a:t>Контекстная </a:t>
             </a:r>
             <a:r>
-              <a:rPr lang="en-US" dirty="0" smtClean="0"/>
+              <a:rPr lang="en-US" dirty="0"/>
               <a:t> </a:t>
             </a:r>
             <a:r>
-              <a:rPr lang="ru-RU" dirty="0" smtClean="0"/>
+              <a:rPr lang="ru-RU" dirty="0"/>
               <a:t>Диаграмма </a:t>
             </a:r>
             <a:r>
-              <a:rPr lang="en-US" dirty="0" smtClean="0"/>
+              <a:rPr lang="en-US" dirty="0"/>
               <a:t>idef0 </a:t>
             </a:r>
             <a:r>
-              <a:rPr lang="ru-RU" dirty="0" smtClean="0"/>
+              <a:rPr lang="ru-RU" dirty="0"/>
               <a:t>«Проведение сделки»</a:t>
             </a:r>
-            <a:endParaRPr lang="ru-RU" dirty="0"/>
           </a:p>
         </p:txBody>
       </p:sp>
@@ -6848,13 +6481,6 @@
   <p:clrMapOvr>
     <a:masterClrMapping/>
   </p:clrMapOvr>
-  <p:timing>
-    <p:tnLst>
-      <p:par>
-        <p:cTn id="1" dur="indefinite" restart="never" nodeType="tmRoot"/>
-      </p:par>
-    </p:tnLst>
-  </p:timing>
 </p:sld>
 </file>
 
@@ -6906,10 +6532,9 @@
               <a:t>IDEF0 </a:t>
             </a:r>
             <a:r>
-              <a:rPr lang="ru-RU" dirty="0" smtClean="0"/>
+              <a:rPr lang="ru-RU" dirty="0"/>
               <a:t>(1ур.)</a:t>
             </a:r>
-            <a:endParaRPr lang="ru-RU" dirty="0"/>
           </a:p>
         </p:txBody>
       </p:sp>
@@ -6949,13 +6574,6 @@
   <p:clrMapOvr>
     <a:masterClrMapping/>
   </p:clrMapOvr>
-  <p:timing>
-    <p:tnLst>
-      <p:par>
-        <p:cTn id="1" dur="indefinite" restart="never" nodeType="tmRoot"/>
-      </p:par>
-    </p:tnLst>
-  </p:timing>
 </p:sld>
 </file>
 
@@ -6997,18 +6615,9 @@
           <a:lstStyle/>
           <a:p>
             <a:r>
-              <a:rPr lang="ru-RU" dirty="0" smtClean="0"/>
-              <a:t>Контекстная ДИАГРАММА </a:t>
-            </a:r>
-            <a:r>
               <a:rPr lang="ru-RU" dirty="0"/>
-              <a:t>DFD </a:t>
-            </a:r>
-            <a:r>
-              <a:rPr lang="ru-RU" dirty="0" smtClean="0"/>
-              <a:t>«Проведение сделки»</a:t>
-            </a:r>
-            <a:endParaRPr lang="ru-RU" dirty="0"/>
+              <a:t>Контекстная ДИАГРАММА DFD «Проведение сделки»</a:t>
+            </a:r>
           </a:p>
         </p:txBody>
       </p:sp>
@@ -7044,13 +6653,6 @@
   <p:clrMapOvr>
     <a:masterClrMapping/>
   </p:clrMapOvr>
-  <p:timing>
-    <p:tnLst>
-      <p:par>
-        <p:cTn id="1" dur="indefinite" restart="never" nodeType="tmRoot"/>
-      </p:par>
-    </p:tnLst>
-  </p:timing>
 </p:sld>
 </file>
 
@@ -7096,14 +6698,13 @@
               <a:t>ДЕКОМПОЗИЦИЯ ДИАГРАММЫ </a:t>
             </a:r>
             <a:r>
-              <a:rPr lang="en-US" dirty="0" smtClean="0"/>
+              <a:rPr lang="en-US" dirty="0"/>
               <a:t>DFD</a:t>
             </a:r>
             <a:r>
-              <a:rPr lang="ru-RU" dirty="0" smtClean="0"/>
+              <a:rPr lang="ru-RU" dirty="0"/>
               <a:t> (1ур.)</a:t>
             </a:r>
-            <a:endParaRPr lang="ru-RU" dirty="0"/>
           </a:p>
         </p:txBody>
       </p:sp>
@@ -7143,13 +6744,6 @@
   <p:clrMapOvr>
     <a:masterClrMapping/>
   </p:clrMapOvr>
-  <p:timing>
-    <p:tnLst>
-      <p:par>
-        <p:cTn id="1" dur="indefinite" restart="never" nodeType="tmRoot"/>
-      </p:par>
-    </p:tnLst>
-  </p:timing>
 </p:sld>
 </file>
 
